--- a/entertainment-os/docs/Entertainment-OS-Overview.pptx
+++ b/entertainment-os/docs/Entertainment-OS-Overview.pptx
@@ -18,9 +18,10 @@
     <p:sldId id="266" r:id="rId12"/>
     <p:sldId id="267" r:id="rId13"/>
     <p:sldId id="268" r:id="rId14"/>
+    <p:sldId id="269" r:id="rId15"/>
   </p:sldIdLst>
   <p:notesMasterIdLst>
-    <p:notesMasterId r:id="rId15"/>
+    <p:notesMasterId r:id="rId16"/>
   </p:notesMasterIdLst>
   <p:sldSz cx="12192000" cy="6858000"/>
   <p:notesSz cx="6858000" cy="12192000"/>
@@ -243,7 +244,7 @@
                 <c:formatCode>General</c:formatCode>
                 <c:ptCount val="7"/>
                 <c:pt idx="0">
-                  <c:v>4820</c:v>
+                  <c:v>2420</c:v>
                 </c:pt>
                 <c:pt idx="1">
                   <c:v>152000</c:v>
@@ -1190,6 +1191,94 @@
 </p:notes>
 </file>
 
+<file path=ppt/notesSlides/notesSlide14.xml><?xml version="1.0" encoding="utf-8"?>
+<p:notes xmlns:a="http://schemas.openxmlformats.org/drawingml/2006/main" xmlns:r="http://schemas.openxmlformats.org/officeDocument/2006/relationships" xmlns:p="http://schemas.openxmlformats.org/presentationml/2006/main">
+  <p:cSld>
+    <p:spTree>
+      <p:nvGrpSpPr>
+        <p:cNvPr id="1" name=""/>
+        <p:cNvGrpSpPr/>
+        <p:nvPr/>
+      </p:nvGrpSpPr>
+      <p:grpSpPr>
+        <a:xfrm>
+          <a:off x="0" y="0"/>
+          <a:ext cx="0" cy="0"/>
+          <a:chOff x="0" y="0"/>
+          <a:chExt cx="0" cy="0"/>
+        </a:xfrm>
+      </p:grpSpPr>
+      <p:sp>
+        <p:nvSpPr>
+          <p:cNvPr id="2" name="Slide Image Placeholder 1"/>
+          <p:cNvSpPr>
+            <a:spLocks noGrp="1" noRot="1" noChangeAspect="1"/>
+          </p:cNvSpPr>
+          <p:nvPr>
+            <p:ph type="sldImg"/>
+          </p:nvPr>
+        </p:nvSpPr>
+        <p:spPr/>
+      </p:sp>
+      <p:sp>
+        <p:nvSpPr>
+          <p:cNvPr id="3" name="Notes Placeholder 2"/>
+          <p:cNvSpPr>
+            <a:spLocks noGrp="1"/>
+          </p:cNvSpPr>
+          <p:nvPr>
+            <p:ph type="body" idx="1"/>
+          </p:nvPr>
+        </p:nvSpPr>
+        <p:spPr/>
+        <p:txBody>
+          <a:bodyPr/>
+          <a:lstStyle/>
+          <a:p>
+            <a:r>
+              <a:rPr lang="en-US" dirty="0"/>
+              <a:t/>
+            </a:r>
+            <a:endParaRPr lang="en-US" dirty="0"/>
+          </a:p>
+        </p:txBody>
+      </p:sp>
+      <p:sp>
+        <p:nvSpPr>
+          <p:cNvPr id="4" name="Slide Number Placeholder 3"/>
+          <p:cNvSpPr>
+            <a:spLocks noGrp="1"/>
+          </p:cNvSpPr>
+          <p:nvPr>
+            <p:ph type="sldNum" sz="quarter" idx="10"/>
+          </p:nvPr>
+        </p:nvSpPr>
+        <p:spPr/>
+        <p:txBody>
+          <a:bodyPr/>
+          <a:lstStyle/>
+          <a:p>
+            <a:fld id="{F7021451-1387-4CA6-816F-3879F97B5CBC}" type="slidenum">
+              <a:rPr lang="en-US"/>
+              <a:t>14</a:t>
+            </a:fld>
+            <a:endParaRPr lang="en-US"/>
+          </a:p>
+        </p:txBody>
+      </p:sp>
+    </p:spTree>
+    <p:extLst>
+      <p:ext uri="{BB962C8B-B14F-4D97-AF65-F5344CB8AC3E}">
+        <p14:creationId xmlns:p14="http://schemas.microsoft.com/office/powerpoint/2010/main" val="1024086991"/>
+      </p:ext>
+    </p:extLst>
+  </p:cSld>
+  <p:clrMapOvr>
+    <a:masterClrMapping/>
+  </p:clrMapOvr>
+</p:notes>
+</file>
+
 <file path=ppt/notesSlides/notesSlide2.xml><?xml version="1.0" encoding="utf-8"?>
 <p:notes xmlns:a="http://schemas.openxmlformats.org/drawingml/2006/main" xmlns:r="http://schemas.openxmlformats.org/officeDocument/2006/relationships" xmlns:p="http://schemas.openxmlformats.org/presentationml/2006/main">
   <p:cSld>
@@ -1588,7 +1677,7 @@
           <a:p>
             <a:r>
               <a:rPr lang="en-US" dirty="0"/>
-              <a:t>The Concierge can use Claude for intake when an API key is configured; budget, policy and approval decisions are always plain code.</a:t>
+              <a:t/>
             </a:r>
             <a:endParaRPr lang="en-US" dirty="0"/>
           </a:p>
@@ -1676,7 +1765,7 @@
           <a:p>
             <a:r>
               <a:rPr lang="en-US" dirty="0"/>
-              <a:t/>
+              <a:t>The Concierge can use Claude for intake when an API key is configured; budget, policy and approval decisions are always plain code.</a:t>
             </a:r>
             <a:endParaRPr lang="en-US" dirty="0"/>
           </a:p>
@@ -2402,6 +2491,900 @@
 <file path=ppt/slides/slide10.xml><?xml version="1.0" encoding="utf-8"?>
 <p:sld xmlns:a="http://schemas.openxmlformats.org/drawingml/2006/main" xmlns:r="http://schemas.openxmlformats.org/officeDocument/2006/relationships" xmlns:p="http://schemas.openxmlformats.org/presentationml/2006/main">
   <p:cSld name="Slide 10">
+    <p:spTree>
+      <p:nvGrpSpPr>
+        <p:cNvPr id="1" name=""/>
+        <p:cNvGrpSpPr/>
+        <p:nvPr/>
+      </p:nvGrpSpPr>
+      <p:grpSpPr>
+        <a:xfrm>
+          <a:off x="0" y="0"/>
+          <a:ext cx="0" cy="0"/>
+          <a:chOff x="0" y="0"/>
+          <a:chExt cx="0" cy="0"/>
+        </a:xfrm>
+      </p:grpSpPr>
+      <p:sp>
+        <p:nvSpPr>
+          <p:cNvPr id="2" name="Text 0"/>
+          <p:cNvSpPr txBox="1"/>
+          <p:nvPr/>
+        </p:nvSpPr>
+        <p:spPr>
+          <a:xfrm>
+            <a:off x="548640" y="365760"/>
+            <a:ext cx="11094415" cy="731520"/>
+          </a:xfrm>
+          <a:prstGeom prst="rect">
+            <a:avLst/>
+          </a:prstGeom>
+          <a:noFill/>
+          <a:ln/>
+        </p:spPr>
+        <p:txBody>
+          <a:bodyPr wrap="square" lIns="0" tIns="0" rIns="0" bIns="0" rtlCol="0" anchor="ctr"/>
+          <a:lstStyle/>
+          <a:p>
+            <a:pPr indent="0" marL="0">
+              <a:buNone/>
+            </a:pPr>
+            <a:r>
+              <a:rPr lang="en-US" sz="3400" b="1" dirty="0">
+                <a:solidFill>
+                  <a:srgbClr val="1B1938"/>
+                </a:solidFill>
+                <a:latin typeface="Cambria" pitchFamily="34" charset="0"/>
+                <a:ea typeface="Cambria" pitchFamily="34" charset="-122"/>
+                <a:cs typeface="Cambria" pitchFamily="34" charset="-120"/>
+              </a:rPr>
+              <a:t>Spent your own money? Expense reports</a:t>
+            </a:r>
+            <a:endParaRPr lang="en-US" sz="3400" dirty="0"/>
+          </a:p>
+        </p:txBody>
+      </p:sp>
+      <p:sp>
+        <p:nvSpPr>
+          <p:cNvPr id="3" name="Text 1"/>
+          <p:cNvSpPr txBox="1"/>
+          <p:nvPr/>
+        </p:nvSpPr>
+        <p:spPr>
+          <a:xfrm>
+            <a:off x="548640" y="1051560"/>
+            <a:ext cx="11094415" cy="411480"/>
+          </a:xfrm>
+          <a:prstGeom prst="rect">
+            <a:avLst/>
+          </a:prstGeom>
+          <a:noFill/>
+          <a:ln/>
+        </p:spPr>
+        <p:txBody>
+          <a:bodyPr wrap="square" lIns="0" tIns="0" rIns="0" bIns="0" rtlCol="0" anchor="ctr"/>
+          <a:lstStyle/>
+          <a:p>
+            <a:pPr indent="0" marL="0">
+              <a:buNone/>
+            </a:pPr>
+            <a:r>
+              <a:rPr lang="en-US" sz="1500" dirty="0">
+                <a:solidFill>
+                  <a:srgbClr val="6E6A86"/>
+                </a:solidFill>
+                <a:latin typeface="Calibri" pitchFamily="34" charset="0"/>
+                <a:ea typeface="Calibri" pitchFamily="34" charset="-122"/>
+                <a:cs typeface="Calibri" pitchFamily="34" charset="-120"/>
+              </a:rPr>
+              <a:t>The Expense agent drafts the report with receipts and routes it to the right team.</a:t>
+            </a:r>
+            <a:endParaRPr lang="en-US" sz="1500" dirty="0"/>
+          </a:p>
+        </p:txBody>
+      </p:sp>
+      <p:sp>
+        <p:nvSpPr>
+          <p:cNvPr id="4" name="Shape 2"/>
+          <p:cNvSpPr/>
+          <p:nvPr/>
+        </p:nvSpPr>
+        <p:spPr>
+          <a:xfrm>
+            <a:off x="548640" y="1783080"/>
+            <a:ext cx="2264603" cy="868680"/>
+          </a:xfrm>
+          <a:prstGeom prst="chevron">
+            <a:avLst/>
+          </a:prstGeom>
+          <a:solidFill>
+            <a:srgbClr val="ECEBFF"/>
+          </a:solidFill>
+          <a:ln w="12700">
+            <a:solidFill>
+              <a:srgbClr val="FFFFFF"/>
+            </a:solidFill>
+            <a:prstDash val="solid"/>
+          </a:ln>
+        </p:spPr>
+      </p:sp>
+      <p:sp>
+        <p:nvSpPr>
+          <p:cNvPr id="5" name="Text 3"/>
+          <p:cNvSpPr txBox="1"/>
+          <p:nvPr/>
+        </p:nvSpPr>
+        <p:spPr>
+          <a:xfrm>
+            <a:off x="896112" y="1783080"/>
+            <a:ext cx="1670243" cy="868680"/>
+          </a:xfrm>
+          <a:prstGeom prst="rect">
+            <a:avLst/>
+          </a:prstGeom>
+          <a:noFill/>
+          <a:ln/>
+        </p:spPr>
+        <p:txBody>
+          <a:bodyPr wrap="square" lIns="0" tIns="0" rIns="0" bIns="0" rtlCol="0" anchor="ctr"/>
+          <a:lstStyle/>
+          <a:p>
+            <a:pPr algn="ctr" indent="0" marL="0">
+              <a:buNone/>
+            </a:pPr>
+            <a:r>
+              <a:rPr lang="en-US" sz="1200" b="1" dirty="0">
+                <a:solidFill>
+                  <a:srgbClr val="4B3FD1"/>
+                </a:solidFill>
+                <a:latin typeface="Calibri" pitchFamily="34" charset="0"/>
+                <a:ea typeface="Calibri" pitchFamily="34" charset="-122"/>
+                <a:cs typeface="Calibri" pitchFamily="34" charset="-120"/>
+              </a:rPr>
+              <a:t>Book as "paid personally"</a:t>
+            </a:r>
+            <a:endParaRPr lang="en-US" sz="1200" dirty="0"/>
+          </a:p>
+        </p:txBody>
+      </p:sp>
+      <p:sp>
+        <p:nvSpPr>
+          <p:cNvPr id="6" name="Shape 4"/>
+          <p:cNvSpPr/>
+          <p:nvPr/>
+        </p:nvSpPr>
+        <p:spPr>
+          <a:xfrm>
+            <a:off x="2767523" y="1783080"/>
+            <a:ext cx="2264603" cy="868680"/>
+          </a:xfrm>
+          <a:prstGeom prst="chevron">
+            <a:avLst/>
+          </a:prstGeom>
+          <a:solidFill>
+            <a:srgbClr val="ECEBFF"/>
+          </a:solidFill>
+          <a:ln w="12700">
+            <a:solidFill>
+              <a:srgbClr val="FFFFFF"/>
+            </a:solidFill>
+            <a:prstDash val="solid"/>
+          </a:ln>
+        </p:spPr>
+      </p:sp>
+      <p:sp>
+        <p:nvSpPr>
+          <p:cNvPr id="7" name="Text 5"/>
+          <p:cNvSpPr txBox="1"/>
+          <p:nvPr/>
+        </p:nvSpPr>
+        <p:spPr>
+          <a:xfrm>
+            <a:off x="3114995" y="1783080"/>
+            <a:ext cx="1670243" cy="868680"/>
+          </a:xfrm>
+          <a:prstGeom prst="rect">
+            <a:avLst/>
+          </a:prstGeom>
+          <a:noFill/>
+          <a:ln/>
+        </p:spPr>
+        <p:txBody>
+          <a:bodyPr wrap="square" lIns="0" tIns="0" rIns="0" bIns="0" rtlCol="0" anchor="ctr"/>
+          <a:lstStyle/>
+          <a:p>
+            <a:pPr algn="ctr" indent="0" marL="0">
+              <a:buNone/>
+            </a:pPr>
+            <a:r>
+              <a:rPr lang="en-US" sz="1200" b="1" dirty="0">
+                <a:solidFill>
+                  <a:srgbClr val="4B3FD1"/>
+                </a:solidFill>
+                <a:latin typeface="Calibri" pitchFamily="34" charset="0"/>
+                <a:ea typeface="Calibri" pitchFamily="34" charset="-122"/>
+                <a:cs typeface="Calibri" pitchFamily="34" charset="-120"/>
+              </a:rPr>
+              <a:t>Confirmed, receipt captured</a:t>
+            </a:r>
+            <a:endParaRPr lang="en-US" sz="1200" dirty="0"/>
+          </a:p>
+        </p:txBody>
+      </p:sp>
+      <p:sp>
+        <p:nvSpPr>
+          <p:cNvPr id="8" name="Shape 6"/>
+          <p:cNvSpPr/>
+          <p:nvPr/>
+        </p:nvSpPr>
+        <p:spPr>
+          <a:xfrm>
+            <a:off x="4986406" y="1783080"/>
+            <a:ext cx="2264603" cy="868680"/>
+          </a:xfrm>
+          <a:prstGeom prst="chevron">
+            <a:avLst/>
+          </a:prstGeom>
+          <a:solidFill>
+            <a:srgbClr val="ECEBFF"/>
+          </a:solidFill>
+          <a:ln w="12700">
+            <a:solidFill>
+              <a:srgbClr val="FFFFFF"/>
+            </a:solidFill>
+            <a:prstDash val="solid"/>
+          </a:ln>
+        </p:spPr>
+      </p:sp>
+      <p:sp>
+        <p:nvSpPr>
+          <p:cNvPr id="9" name="Text 7"/>
+          <p:cNvSpPr txBox="1"/>
+          <p:nvPr/>
+        </p:nvSpPr>
+        <p:spPr>
+          <a:xfrm>
+            <a:off x="5333878" y="1783080"/>
+            <a:ext cx="1670243" cy="868680"/>
+          </a:xfrm>
+          <a:prstGeom prst="rect">
+            <a:avLst/>
+          </a:prstGeom>
+          <a:noFill/>
+          <a:ln/>
+        </p:spPr>
+        <p:txBody>
+          <a:bodyPr wrap="square" lIns="0" tIns="0" rIns="0" bIns="0" rtlCol="0" anchor="ctr"/>
+          <a:lstStyle/>
+          <a:p>
+            <a:pPr algn="ctr" indent="0" marL="0">
+              <a:buNone/>
+            </a:pPr>
+            <a:r>
+              <a:rPr lang="en-US" sz="1200" b="1" dirty="0">
+                <a:solidFill>
+                  <a:srgbClr val="4B3FD1"/>
+                </a:solidFill>
+                <a:latin typeface="Calibri" pitchFamily="34" charset="0"/>
+                <a:ea typeface="Calibri" pitchFamily="34" charset="-122"/>
+                <a:cs typeface="Calibri" pitchFamily="34" charset="-120"/>
+              </a:rPr>
+              <a:t>Select bookings → submit</a:t>
+            </a:r>
+            <a:endParaRPr lang="en-US" sz="1200" dirty="0"/>
+          </a:p>
+        </p:txBody>
+      </p:sp>
+      <p:sp>
+        <p:nvSpPr>
+          <p:cNvPr id="10" name="Shape 8"/>
+          <p:cNvSpPr/>
+          <p:nvPr/>
+        </p:nvSpPr>
+        <p:spPr>
+          <a:xfrm>
+            <a:off x="7205289" y="1783080"/>
+            <a:ext cx="2264603" cy="868680"/>
+          </a:xfrm>
+          <a:prstGeom prst="chevron">
+            <a:avLst/>
+          </a:prstGeom>
+          <a:solidFill>
+            <a:srgbClr val="ECEBFF"/>
+          </a:solidFill>
+          <a:ln w="12700">
+            <a:solidFill>
+              <a:srgbClr val="FFFFFF"/>
+            </a:solidFill>
+            <a:prstDash val="solid"/>
+          </a:ln>
+        </p:spPr>
+      </p:sp>
+      <p:sp>
+        <p:nvSpPr>
+          <p:cNvPr id="11" name="Text 9"/>
+          <p:cNvSpPr txBox="1"/>
+          <p:nvPr/>
+        </p:nvSpPr>
+        <p:spPr>
+          <a:xfrm>
+            <a:off x="7552761" y="1783080"/>
+            <a:ext cx="1670243" cy="868680"/>
+          </a:xfrm>
+          <a:prstGeom prst="rect">
+            <a:avLst/>
+          </a:prstGeom>
+          <a:noFill/>
+          <a:ln/>
+        </p:spPr>
+        <p:txBody>
+          <a:bodyPr wrap="square" lIns="0" tIns="0" rIns="0" bIns="0" rtlCol="0" anchor="ctr"/>
+          <a:lstStyle/>
+          <a:p>
+            <a:pPr algn="ctr" indent="0" marL="0">
+              <a:buNone/>
+            </a:pPr>
+            <a:r>
+              <a:rPr lang="en-US" sz="1200" b="1" dirty="0">
+                <a:solidFill>
+                  <a:srgbClr val="4B3FD1"/>
+                </a:solidFill>
+                <a:latin typeface="Calibri" pitchFamily="34" charset="0"/>
+                <a:ea typeface="Calibri" pitchFamily="34" charset="-122"/>
+                <a:cs typeface="Calibri" pitchFamily="34" charset="-120"/>
+              </a:rPr>
+              <a:t>Routed by report type</a:t>
+            </a:r>
+            <a:endParaRPr lang="en-US" sz="1200" dirty="0"/>
+          </a:p>
+        </p:txBody>
+      </p:sp>
+      <p:sp>
+        <p:nvSpPr>
+          <p:cNvPr id="12" name="Shape 10"/>
+          <p:cNvSpPr/>
+          <p:nvPr/>
+        </p:nvSpPr>
+        <p:spPr>
+          <a:xfrm>
+            <a:off x="9424172" y="1783080"/>
+            <a:ext cx="2264603" cy="868680"/>
+          </a:xfrm>
+          <a:prstGeom prst="chevron">
+            <a:avLst/>
+          </a:prstGeom>
+          <a:solidFill>
+            <a:srgbClr val="1D8A5A"/>
+          </a:solidFill>
+          <a:ln w="12700">
+            <a:solidFill>
+              <a:srgbClr val="FFFFFF"/>
+            </a:solidFill>
+            <a:prstDash val="solid"/>
+          </a:ln>
+        </p:spPr>
+      </p:sp>
+      <p:sp>
+        <p:nvSpPr>
+          <p:cNvPr id="13" name="Text 11"/>
+          <p:cNvSpPr txBox="1"/>
+          <p:nvPr/>
+        </p:nvSpPr>
+        <p:spPr>
+          <a:xfrm>
+            <a:off x="9771644" y="1783080"/>
+            <a:ext cx="1670243" cy="868680"/>
+          </a:xfrm>
+          <a:prstGeom prst="rect">
+            <a:avLst/>
+          </a:prstGeom>
+          <a:noFill/>
+          <a:ln/>
+        </p:spPr>
+        <p:txBody>
+          <a:bodyPr wrap="square" lIns="0" tIns="0" rIns="0" bIns="0" rtlCol="0" anchor="ctr"/>
+          <a:lstStyle/>
+          <a:p>
+            <a:pPr algn="ctr" indent="0" marL="0">
+              <a:buNone/>
+            </a:pPr>
+            <a:r>
+              <a:rPr lang="en-US" sz="1200" b="1" dirty="0">
+                <a:solidFill>
+                  <a:srgbClr val="FFFFFF"/>
+                </a:solidFill>
+                <a:latin typeface="Calibri" pitchFamily="34" charset="0"/>
+                <a:ea typeface="Calibri" pitchFamily="34" charset="-122"/>
+                <a:cs typeface="Calibri" pitchFamily="34" charset="-120"/>
+              </a:rPr>
+              <a:t>Approved → reimbursed with payroll</a:t>
+            </a:r>
+            <a:endParaRPr lang="en-US" sz="1200" dirty="0"/>
+          </a:p>
+        </p:txBody>
+      </p:sp>
+      <p:sp>
+        <p:nvSpPr>
+          <p:cNvPr id="14" name="Shape 12"/>
+          <p:cNvSpPr/>
+          <p:nvPr/>
+        </p:nvSpPr>
+        <p:spPr>
+          <a:xfrm>
+            <a:off x="548640" y="3063240"/>
+            <a:ext cx="3520440" cy="2011680"/>
+          </a:xfrm>
+          <a:prstGeom prst="roundRect">
+            <a:avLst>
+              <a:gd name="adj" fmla="val 6818"/>
+            </a:avLst>
+          </a:prstGeom>
+          <a:solidFill>
+            <a:srgbClr val="ECEBFF"/>
+          </a:solidFill>
+          <a:ln w="12700">
+            <a:solidFill>
+              <a:srgbClr val="ECEBFF"/>
+            </a:solidFill>
+            <a:prstDash val="solid"/>
+          </a:ln>
+        </p:spPr>
+      </p:sp>
+      <p:sp>
+        <p:nvSpPr>
+          <p:cNvPr id="15" name="Text 13"/>
+          <p:cNvSpPr txBox="1"/>
+          <p:nvPr/>
+        </p:nvSpPr>
+        <p:spPr>
+          <a:xfrm>
+            <a:off x="822960" y="3246120"/>
+            <a:ext cx="3017520" cy="411480"/>
+          </a:xfrm>
+          <a:prstGeom prst="rect">
+            <a:avLst/>
+          </a:prstGeom>
+          <a:noFill/>
+          <a:ln/>
+        </p:spPr>
+        <p:txBody>
+          <a:bodyPr wrap="square" lIns="0" tIns="0" rIns="0" bIns="0" rtlCol="0" anchor="ctr"/>
+          <a:lstStyle/>
+          <a:p>
+            <a:pPr indent="0" marL="0">
+              <a:buNone/>
+            </a:pPr>
+            <a:r>
+              <a:rPr lang="en-US" sz="1900" b="1" dirty="0">
+                <a:solidFill>
+                  <a:srgbClr val="4B3FD1"/>
+                </a:solidFill>
+                <a:latin typeface="Cambria" pitchFamily="34" charset="0"/>
+                <a:ea typeface="Cambria" pitchFamily="34" charset="-122"/>
+                <a:cs typeface="Cambria" pitchFamily="34" charset="-120"/>
+              </a:rPr>
+              <a:t>Client / business</a:t>
+            </a:r>
+            <a:endParaRPr lang="en-US" sz="1900" dirty="0"/>
+          </a:p>
+        </p:txBody>
+      </p:sp>
+      <p:sp>
+        <p:nvSpPr>
+          <p:cNvPr id="16" name="Text 14"/>
+          <p:cNvSpPr txBox="1"/>
+          <p:nvPr/>
+        </p:nvSpPr>
+        <p:spPr>
+          <a:xfrm>
+            <a:off x="822960" y="3703320"/>
+            <a:ext cx="3017520" cy="457200"/>
+          </a:xfrm>
+          <a:prstGeom prst="rect">
+            <a:avLst/>
+          </a:prstGeom>
+          <a:noFill/>
+          <a:ln/>
+        </p:spPr>
+        <p:txBody>
+          <a:bodyPr wrap="square" lIns="0" tIns="0" rIns="0" bIns="0" rtlCol="0" anchor="ctr"/>
+          <a:lstStyle/>
+          <a:p>
+            <a:pPr indent="0" marL="0">
+              <a:buNone/>
+            </a:pPr>
+            <a:r>
+              <a:rPr lang="en-US" sz="1300" dirty="0">
+                <a:solidFill>
+                  <a:srgbClr val="6E6A86"/>
+                </a:solidFill>
+                <a:latin typeface="Calibri" pitchFamily="34" charset="0"/>
+                <a:ea typeface="Calibri" pitchFamily="34" charset="-122"/>
+                <a:cs typeface="Calibri" pitchFamily="34" charset="-120"/>
+              </a:rPr>
+              <a:t>Client lunch, prospect drinks</a:t>
+            </a:r>
+            <a:endParaRPr lang="en-US" sz="1300" dirty="0"/>
+          </a:p>
+        </p:txBody>
+      </p:sp>
+      <p:sp>
+        <p:nvSpPr>
+          <p:cNvPr id="17" name="Text 15"/>
+          <p:cNvSpPr txBox="1"/>
+          <p:nvPr/>
+        </p:nvSpPr>
+        <p:spPr>
+          <a:xfrm>
+            <a:off x="822960" y="4251960"/>
+            <a:ext cx="3017520" cy="640080"/>
+          </a:xfrm>
+          <a:prstGeom prst="rect">
+            <a:avLst/>
+          </a:prstGeom>
+          <a:noFill/>
+          <a:ln/>
+        </p:spPr>
+        <p:txBody>
+          <a:bodyPr wrap="square" lIns="0" tIns="0" rIns="0" bIns="0" rtlCol="0" anchor="t"/>
+          <a:lstStyle/>
+          <a:p>
+            <a:pPr indent="0" marL="0">
+              <a:buNone/>
+            </a:pPr>
+            <a:r>
+              <a:rPr lang="en-US" sz="1500" b="1" dirty="0">
+                <a:solidFill>
+                  <a:srgbClr val="1B1938"/>
+                </a:solidFill>
+                <a:latin typeface="Calibri" pitchFamily="34" charset="0"/>
+                <a:ea typeface="Calibri" pitchFamily="34" charset="-122"/>
+                <a:cs typeface="Calibri" pitchFamily="34" charset="-120"/>
+              </a:rPr>
+              <a:t>Manager → Finance</a:t>
+            </a:r>
+            <a:endParaRPr lang="en-US" sz="1500" dirty="0"/>
+          </a:p>
+        </p:txBody>
+      </p:sp>
+      <p:sp>
+        <p:nvSpPr>
+          <p:cNvPr id="18" name="Shape 16"/>
+          <p:cNvSpPr/>
+          <p:nvPr/>
+        </p:nvSpPr>
+        <p:spPr>
+          <a:xfrm>
+            <a:off x="4297680" y="3063240"/>
+            <a:ext cx="3520440" cy="2011680"/>
+          </a:xfrm>
+          <a:prstGeom prst="roundRect">
+            <a:avLst>
+              <a:gd name="adj" fmla="val 6818"/>
+            </a:avLst>
+          </a:prstGeom>
+          <a:solidFill>
+            <a:srgbClr val="E3F5EC"/>
+          </a:solidFill>
+          <a:ln w="12700">
+            <a:solidFill>
+              <a:srgbClr val="E3F5EC"/>
+            </a:solidFill>
+            <a:prstDash val="solid"/>
+          </a:ln>
+        </p:spPr>
+      </p:sp>
+      <p:sp>
+        <p:nvSpPr>
+          <p:cNvPr id="19" name="Text 17"/>
+          <p:cNvSpPr txBox="1"/>
+          <p:nvPr/>
+        </p:nvSpPr>
+        <p:spPr>
+          <a:xfrm>
+            <a:off x="4572000" y="3246120"/>
+            <a:ext cx="3017520" cy="411480"/>
+          </a:xfrm>
+          <a:prstGeom prst="rect">
+            <a:avLst/>
+          </a:prstGeom>
+          <a:noFill/>
+          <a:ln/>
+        </p:spPr>
+        <p:txBody>
+          <a:bodyPr wrap="square" lIns="0" tIns="0" rIns="0" bIns="0" rtlCol="0" anchor="ctr"/>
+          <a:lstStyle/>
+          <a:p>
+            <a:pPr indent="0" marL="0">
+              <a:buNone/>
+            </a:pPr>
+            <a:r>
+              <a:rPr lang="en-US" sz="1900" b="1" dirty="0">
+                <a:solidFill>
+                  <a:srgbClr val="1D8A5A"/>
+                </a:solidFill>
+                <a:latin typeface="Cambria" pitchFamily="34" charset="0"/>
+                <a:ea typeface="Cambria" pitchFamily="34" charset="-122"/>
+                <a:cs typeface="Cambria" pitchFamily="34" charset="-120"/>
+              </a:rPr>
+              <a:t>Team morale</a:t>
+            </a:r>
+            <a:endParaRPr lang="en-US" sz="1900" dirty="0"/>
+          </a:p>
+        </p:txBody>
+      </p:sp>
+      <p:sp>
+        <p:nvSpPr>
+          <p:cNvPr id="20" name="Text 18"/>
+          <p:cNvSpPr txBox="1"/>
+          <p:nvPr/>
+        </p:nvSpPr>
+        <p:spPr>
+          <a:xfrm>
+            <a:off x="4572000" y="3703320"/>
+            <a:ext cx="3017520" cy="457200"/>
+          </a:xfrm>
+          <a:prstGeom prst="rect">
+            <a:avLst/>
+          </a:prstGeom>
+          <a:noFill/>
+          <a:ln/>
+        </p:spPr>
+        <p:txBody>
+          <a:bodyPr wrap="square" lIns="0" tIns="0" rIns="0" bIns="0" rtlCol="0" anchor="ctr"/>
+          <a:lstStyle/>
+          <a:p>
+            <a:pPr indent="0" marL="0">
+              <a:buNone/>
+            </a:pPr>
+            <a:r>
+              <a:rPr lang="en-US" sz="1300" dirty="0">
+                <a:solidFill>
+                  <a:srgbClr val="6E6A86"/>
+                </a:solidFill>
+                <a:latin typeface="Calibri" pitchFamily="34" charset="0"/>
+                <a:ea typeface="Calibri" pitchFamily="34" charset="-122"/>
+                <a:cs typeface="Calibri" pitchFamily="34" charset="-120"/>
+              </a:rPr>
+              <a:t>Team drinks, celebrations, offsites</a:t>
+            </a:r>
+            <a:endParaRPr lang="en-US" sz="1300" dirty="0"/>
+          </a:p>
+        </p:txBody>
+      </p:sp>
+      <p:sp>
+        <p:nvSpPr>
+          <p:cNvPr id="21" name="Text 19"/>
+          <p:cNvSpPr txBox="1"/>
+          <p:nvPr/>
+        </p:nvSpPr>
+        <p:spPr>
+          <a:xfrm>
+            <a:off x="4572000" y="4251960"/>
+            <a:ext cx="3017520" cy="640080"/>
+          </a:xfrm>
+          <a:prstGeom prst="rect">
+            <a:avLst/>
+          </a:prstGeom>
+          <a:noFill/>
+          <a:ln/>
+        </p:spPr>
+        <p:txBody>
+          <a:bodyPr wrap="square" lIns="0" tIns="0" rIns="0" bIns="0" rtlCol="0" anchor="t"/>
+          <a:lstStyle/>
+          <a:p>
+            <a:pPr indent="0" marL="0">
+              <a:buNone/>
+            </a:pPr>
+            <a:r>
+              <a:rPr lang="en-US" sz="1500" b="1" dirty="0">
+                <a:solidFill>
+                  <a:srgbClr val="1B1938"/>
+                </a:solidFill>
+                <a:latin typeface="Calibri" pitchFamily="34" charset="0"/>
+                <a:ea typeface="Calibri" pitchFamily="34" charset="-122"/>
+                <a:cs typeface="Calibri" pitchFamily="34" charset="-120"/>
+              </a:rPr>
+              <a:t>Manager → HR</a:t>
+            </a:r>
+            <a:endParaRPr lang="en-US" sz="1500" dirty="0"/>
+          </a:p>
+        </p:txBody>
+      </p:sp>
+      <p:sp>
+        <p:nvSpPr>
+          <p:cNvPr id="22" name="Shape 20"/>
+          <p:cNvSpPr/>
+          <p:nvPr/>
+        </p:nvSpPr>
+        <p:spPr>
+          <a:xfrm>
+            <a:off x="8046720" y="3063240"/>
+            <a:ext cx="3520440" cy="2011680"/>
+          </a:xfrm>
+          <a:prstGeom prst="roundRect">
+            <a:avLst>
+              <a:gd name="adj" fmla="val 6818"/>
+            </a:avLst>
+          </a:prstGeom>
+          <a:solidFill>
+            <a:srgbClr val="FDF1DC"/>
+          </a:solidFill>
+          <a:ln w="12700">
+            <a:solidFill>
+              <a:srgbClr val="FDF1DC"/>
+            </a:solidFill>
+            <a:prstDash val="solid"/>
+          </a:ln>
+        </p:spPr>
+      </p:sp>
+      <p:sp>
+        <p:nvSpPr>
+          <p:cNvPr id="23" name="Text 21"/>
+          <p:cNvSpPr txBox="1"/>
+          <p:nvPr/>
+        </p:nvSpPr>
+        <p:spPr>
+          <a:xfrm>
+            <a:off x="8321040" y="3246120"/>
+            <a:ext cx="3017520" cy="411480"/>
+          </a:xfrm>
+          <a:prstGeom prst="rect">
+            <a:avLst/>
+          </a:prstGeom>
+          <a:noFill/>
+          <a:ln/>
+        </p:spPr>
+        <p:txBody>
+          <a:bodyPr wrap="square" lIns="0" tIns="0" rIns="0" bIns="0" rtlCol="0" anchor="ctr"/>
+          <a:lstStyle/>
+          <a:p>
+            <a:pPr indent="0" marL="0">
+              <a:buNone/>
+            </a:pPr>
+            <a:r>
+              <a:rPr lang="en-US" sz="1900" b="1" dirty="0">
+                <a:solidFill>
+                  <a:srgbClr val="A8660B"/>
+                </a:solidFill>
+                <a:latin typeface="Cambria" pitchFamily="34" charset="0"/>
+                <a:ea typeface="Cambria" pitchFamily="34" charset="-122"/>
+                <a:cs typeface="Cambria" pitchFamily="34" charset="-120"/>
+              </a:rPr>
+              <a:t>Wellbeing allowance</a:t>
+            </a:r>
+            <a:endParaRPr lang="en-US" sz="1900" dirty="0"/>
+          </a:p>
+        </p:txBody>
+      </p:sp>
+      <p:sp>
+        <p:nvSpPr>
+          <p:cNvPr id="24" name="Text 22"/>
+          <p:cNvSpPr txBox="1"/>
+          <p:nvPr/>
+        </p:nvSpPr>
+        <p:spPr>
+          <a:xfrm>
+            <a:off x="8321040" y="3703320"/>
+            <a:ext cx="3017520" cy="457200"/>
+          </a:xfrm>
+          <a:prstGeom prst="rect">
+            <a:avLst/>
+          </a:prstGeom>
+          <a:noFill/>
+          <a:ln/>
+        </p:spPr>
+        <p:txBody>
+          <a:bodyPr wrap="square" lIns="0" tIns="0" rIns="0" bIns="0" rtlCol="0" anchor="ctr"/>
+          <a:lstStyle/>
+          <a:p>
+            <a:pPr indent="0" marL="0">
+              <a:buNone/>
+            </a:pPr>
+            <a:r>
+              <a:rPr lang="en-US" sz="1300" dirty="0">
+                <a:solidFill>
+                  <a:srgbClr val="6E6A86"/>
+                </a:solidFill>
+                <a:latin typeface="Calibri" pitchFamily="34" charset="0"/>
+                <a:ea typeface="Calibri" pitchFamily="34" charset="-122"/>
+                <a:cs typeface="Calibri" pitchFamily="34" charset="-120"/>
+              </a:rPr>
+              <a:t>Cooking class, fitness, a concert for you</a:t>
+            </a:r>
+            <a:endParaRPr lang="en-US" sz="1300" dirty="0"/>
+          </a:p>
+        </p:txBody>
+      </p:sp>
+      <p:sp>
+        <p:nvSpPr>
+          <p:cNvPr id="25" name="Text 23"/>
+          <p:cNvSpPr txBox="1"/>
+          <p:nvPr/>
+        </p:nvSpPr>
+        <p:spPr>
+          <a:xfrm>
+            <a:off x="8321040" y="4251960"/>
+            <a:ext cx="3017520" cy="640080"/>
+          </a:xfrm>
+          <a:prstGeom prst="rect">
+            <a:avLst/>
+          </a:prstGeom>
+          <a:noFill/>
+          <a:ln/>
+        </p:spPr>
+        <p:txBody>
+          <a:bodyPr wrap="square" lIns="0" tIns="0" rIns="0" bIns="0" rtlCol="0" anchor="t"/>
+          <a:lstStyle/>
+          <a:p>
+            <a:pPr indent="0" marL="0">
+              <a:buNone/>
+            </a:pPr>
+            <a:r>
+              <a:rPr lang="en-US" sz="1500" b="1" dirty="0">
+                <a:solidFill>
+                  <a:srgbClr val="1B1938"/>
+                </a:solidFill>
+                <a:latin typeface="Calibri" pitchFamily="34" charset="0"/>
+                <a:ea typeface="Calibri" pitchFamily="34" charset="-122"/>
+                <a:cs typeface="Calibri" pitchFamily="34" charset="-120"/>
+              </a:rPr>
+              <a:t>Benefits only · capped at your balance</a:t>
+            </a:r>
+            <a:endParaRPr lang="en-US" sz="1500" dirty="0"/>
+          </a:p>
+        </p:txBody>
+      </p:sp>
+      <p:sp>
+        <p:nvSpPr>
+          <p:cNvPr id="26" name="Text 24"/>
+          <p:cNvSpPr txBox="1"/>
+          <p:nvPr/>
+        </p:nvSpPr>
+        <p:spPr>
+          <a:xfrm>
+            <a:off x="548640" y="5440680"/>
+            <a:ext cx="11094415" cy="640080"/>
+          </a:xfrm>
+          <a:prstGeom prst="rect">
+            <a:avLst/>
+          </a:prstGeom>
+          <a:noFill/>
+          <a:ln/>
+        </p:spPr>
+        <p:txBody>
+          <a:bodyPr wrap="square" lIns="0" tIns="0" rIns="0" bIns="0" rtlCol="0" anchor="ctr"/>
+          <a:lstStyle/>
+          <a:p>
+            <a:pPr indent="0" marL="0">
+              <a:buNone/>
+            </a:pPr>
+            <a:r>
+              <a:rPr lang="en-US" sz="1300" dirty="0">
+                <a:solidFill>
+                  <a:srgbClr val="6E6A86"/>
+                </a:solidFill>
+                <a:latin typeface="Calibri" pitchFamily="34" charset="0"/>
+                <a:ea typeface="Calibri" pitchFamily="34" charset="-122"/>
+                <a:cs typeface="Calibri" pitchFamily="34" charset="-120"/>
+              </a:rPr>
+              <a:t>Guardrails: a booking can be claimed only once · only the owner submits · submit within 5 business days · a claimed booking can’t be cancelled until its report is withdrawn.</a:t>
+            </a:r>
+            <a:endParaRPr lang="en-US" sz="1300" dirty="0"/>
+          </a:p>
+        </p:txBody>
+      </p:sp>
+    </p:spTree>
+  </p:cSld>
+  <p:clrMapOvr>
+    <a:masterClrMapping/>
+  </p:clrMapOvr>
+</p:sld>
+</file>
+
+<file path=ppt/slides/slide11.xml><?xml version="1.0" encoding="utf-8"?>
+<p:sld xmlns:a="http://schemas.openxmlformats.org/drawingml/2006/main" xmlns:r="http://schemas.openxmlformats.org/officeDocument/2006/relationships" xmlns:p="http://schemas.openxmlformats.org/presentationml/2006/main">
+  <p:cSld name="Slide 11">
     <p:bg>
       <p:bgPr>
         <a:solidFill>
@@ -2625,7 +3608,7 @@
       </p:sp>
       <p:graphicFrame>
         <p:nvGraphicFramePr>
-          <p:cNvPr id="11" name="Table 0"/>
+          <p:cNvPr id="12" name="Table 0"/>
           <p:cNvGraphicFramePr>
             <a:graphicFrameLocks noGrp="1"/>
           </p:cNvGraphicFramePr>
@@ -3816,9 +4799,9 @@
 </p:sld>
 </file>
 
-<file path=ppt/slides/slide11.xml><?xml version="1.0" encoding="utf-8"?>
+<file path=ppt/slides/slide12.xml><?xml version="1.0" encoding="utf-8"?>
 <p:sld xmlns:a="http://schemas.openxmlformats.org/drawingml/2006/main" xmlns:r="http://schemas.openxmlformats.org/officeDocument/2006/relationships" xmlns:p="http://schemas.openxmlformats.org/presentationml/2006/main">
-  <p:cSld name="Slide 11">
+  <p:cSld name="Slide 12">
     <p:spTree>
       <p:nvGrpSpPr>
         <p:cNvPr id="1" name=""/>
@@ -3944,7 +4927,7 @@
                 <a:ea typeface="Cambria" pitchFamily="34" charset="-122"/>
                 <a:cs typeface="Cambria" pitchFamily="34" charset="-120"/>
               </a:rPr>
-              <a:t>₹9,52,160</a:t>
+              <a:t>₹9,49,760</a:t>
             </a:r>
             <a:endParaRPr lang="en-US" sz="4000" dirty="0"/>
           </a:p>
@@ -4169,9 +5152,9 @@
 </p:sld>
 </file>
 
-<file path=ppt/slides/slide12.xml><?xml version="1.0" encoding="utf-8"?>
+<file path=ppt/slides/slide13.xml><?xml version="1.0" encoding="utf-8"?>
 <p:sld xmlns:a="http://schemas.openxmlformats.org/drawingml/2006/main" xmlns:r="http://schemas.openxmlformats.org/officeDocument/2006/relationships" xmlns:p="http://schemas.openxmlformats.org/presentationml/2006/main">
-  <p:cSld name="Slide 12">
+  <p:cSld name="Slide 13">
     <p:bg>
       <p:bgPr>
         <a:solidFill>
@@ -4914,9 +5897,9 @@
 </p:sld>
 </file>
 
-<file path=ppt/slides/slide13.xml><?xml version="1.0" encoding="utf-8"?>
+<file path=ppt/slides/slide14.xml><?xml version="1.0" encoding="utf-8"?>
 <p:sld xmlns:a="http://schemas.openxmlformats.org/drawingml/2006/main" xmlns:r="http://schemas.openxmlformats.org/officeDocument/2006/relationships" xmlns:p="http://schemas.openxmlformats.org/presentationml/2006/main">
-  <p:cSld name="Slide 13">
+  <p:cSld name="Slide 14">
     <p:bg>
       <p:bgPr>
         <a:solidFill>
@@ -5035,7 +6018,7 @@
                 <a:ea typeface="Calibri" pitchFamily="34" charset="-122"/>
                 <a:cs typeface="Calibri" pitchFamily="34" charset="-120"/>
               </a:rPr>
-              <a:t>Set your city with the location picker (or choose Other and type it)</a:t>
+              <a:t>Type in the chat: “I’m planning to go for a movie today, check the theatres”</a:t>
             </a:r>
             <a:endParaRPr lang="en-US" sz="1800" dirty="0"/>
           </a:p>
@@ -5056,7 +6039,7 @@
                 <a:ea typeface="Calibri" pitchFamily="34" charset="-122"/>
                 <a:cs typeface="Calibri" pitchFamily="34" charset="-120"/>
               </a:rPr>
-              <a:t>Switch "Acting as" to play requester, manager, dept head, Compliance, Finance, HR or Benefits</a:t>
+              <a:t>Set your city (India, Canada, or Other) with the location picker</a:t>
             </a:r>
             <a:endParaRPr lang="en-US" sz="1800" dirty="0"/>
           </a:p>
@@ -5077,7 +6060,7 @@
                 <a:ea typeface="Calibri" pitchFamily="34" charset="-122"/>
                 <a:cs typeface="Calibri" pitchFamily="34" charset="-120"/>
               </a:rPr>
-              <a:t>npm test runs the agent test suite; set ANTHROPIC_API_KEY to let Claude read requests</a:t>
+              <a:t>Switch "Acting as" to play requester, manager, dept head, Compliance, Finance, HR or Benefits</a:t>
             </a:r>
             <a:endParaRPr lang="en-US" sz="1800" dirty="0"/>
           </a:p>
@@ -5098,6 +6081,27 @@
                 <a:ea typeface="Calibri" pitchFamily="34" charset="-122"/>
                 <a:cs typeface="Calibri" pitchFamily="34" charset="-120"/>
               </a:rPr>
+              <a:t>npm test runs the agent test suite; set ANTHROPIC_API_KEY to let Claude read requests</a:t>
+            </a:r>
+            <a:endParaRPr lang="en-US" sz="1800" dirty="0"/>
+          </a:p>
+          <a:p>
+            <a:pPr marL="342900" indent="-342900">
+              <a:spcAft>
+                <a:spcPts val="1200"/>
+              </a:spcAft>
+              <a:buSzPct val="100000"/>
+              <a:buChar char="•"/>
+            </a:pPr>
+            <a:r>
+              <a:rPr lang="en-US" sz="1800" dirty="0">
+                <a:solidFill>
+                  <a:srgbClr val="E3E1FA"/>
+                </a:solidFill>
+                <a:latin typeface="Calibri" pitchFamily="34" charset="0"/>
+                <a:ea typeface="Calibri" pitchFamily="34" charset="-122"/>
+                <a:cs typeface="Calibri" pitchFamily="34" charset="-120"/>
+              </a:rPr>
               <a:t>Companion docs: Handbook (.docx) and Operations Workbook (.xlsx)</a:t>
             </a:r>
             <a:endParaRPr lang="en-US" sz="1800" dirty="0"/>
@@ -5137,7 +6141,7 @@
                 <a:ea typeface="Calibri" pitchFamily="34" charset="-122"/>
                 <a:cs typeface="Calibri" pitchFamily="34" charset="-120"/>
               </a:rPr>
-              <a:t>Movies, cinemas, events and venues in the demo are fictional sample data.</a:t>
+              <a:t>Online: real places, films and fixtures from free APIs. Offline: labelled sample data. Payments are simulated.</a:t>
             </a:r>
             <a:endParaRPr lang="en-US" sz="1200" dirty="0"/>
           </a:p>
@@ -6344,7 +7348,7 @@
                 <a:ea typeface="Calibri" pitchFamily="34" charset="-122"/>
                 <a:cs typeface="Calibri" pitchFamily="34" charset="-120"/>
               </a:rPr>
-              <a:t>India</a:t>
+              <a:t>India · Canada · …</a:t>
             </a:r>
             <a:pPr indent="0" marL="0">
               <a:buNone/>
@@ -6502,7 +7506,7 @@
                 <a:ea typeface="Calibri" pitchFamily="34" charset="-122"/>
                 <a:cs typeface="Calibri" pitchFamily="34" charset="-120"/>
               </a:rPr>
-              <a:t>Karnataka</a:t>
+              <a:t>Karnataka · Ontario</a:t>
             </a:r>
             <a:pPr indent="0" marL="0">
               <a:buNone/>
@@ -6660,7 +7664,7 @@
                 <a:ea typeface="Calibri" pitchFamily="34" charset="-122"/>
                 <a:cs typeface="Calibri" pitchFamily="34" charset="-120"/>
               </a:rPr>
-              <a:t>Bengaluru</a:t>
+              <a:t>Bengaluru · Toronto</a:t>
             </a:r>
             <a:pPr indent="0" marL="0">
               <a:buNone/>
@@ -6869,7 +7873,7 @@
                 <a:ea typeface="Cambria" pitchFamily="34" charset="-122"/>
                 <a:cs typeface="Cambria" pitchFamily="34" charset="-120"/>
               </a:rPr>
-              <a:t>4</a:t>
+              <a:t>35</a:t>
             </a:r>
             <a:endParaRPr lang="en-US" sz="4800" dirty="0"/>
           </a:p>
@@ -6908,7 +7912,7 @@
                 <a:ea typeface="Calibri" pitchFamily="34" charset="-122"/>
                 <a:cs typeface="Calibri" pitchFamily="34" charset="-120"/>
               </a:rPr>
-              <a:t>other countries for travel</a:t>
+              <a:t>Canadian cities in 13 provinces &amp; territories</a:t>
             </a:r>
             <a:endParaRPr lang="en-US" sz="1300" dirty="0"/>
           </a:p>
@@ -7080,7 +8084,7 @@
                 <a:ea typeface="Calibri" pitchFamily="34" charset="-122"/>
                 <a:cs typeface="Calibri" pitchFamily="34" charset="-120"/>
               </a:rPr>
-              <a:t>Prices scale by city tier; abroad is shown in ₹</a:t>
+              <a:t>Abroad, ₹ prices also show the local currency (C$)</a:t>
             </a:r>
             <a:endParaRPr lang="en-US" sz="1300" dirty="0"/>
           </a:p>
@@ -8276,6 +9280,824 @@
                 <a:ea typeface="Cambria" pitchFamily="34" charset="-122"/>
                 <a:cs typeface="Cambria" pitchFamily="34" charset="-120"/>
               </a:rPr>
+              <a:t>Just ask: the chat concierge</a:t>
+            </a:r>
+            <a:endParaRPr lang="en-US" sz="3400" dirty="0"/>
+          </a:p>
+        </p:txBody>
+      </p:sp>
+      <p:sp>
+        <p:nvSpPr>
+          <p:cNvPr id="3" name="Text 1"/>
+          <p:cNvSpPr txBox="1"/>
+          <p:nvPr/>
+        </p:nvSpPr>
+        <p:spPr>
+          <a:xfrm>
+            <a:off x="548640" y="1051560"/>
+            <a:ext cx="11094415" cy="411480"/>
+          </a:xfrm>
+          <a:prstGeom prst="rect">
+            <a:avLst/>
+          </a:prstGeom>
+          <a:noFill/>
+          <a:ln/>
+        </p:spPr>
+        <p:txBody>
+          <a:bodyPr wrap="square" lIns="0" tIns="0" rIns="0" bIns="0" rtlCol="0" anchor="ctr"/>
+          <a:lstStyle/>
+          <a:p>
+            <a:pPr indent="0" marL="0">
+              <a:buNone/>
+            </a:pPr>
+            <a:r>
+              <a:rPr lang="en-US" sz="1500" dirty="0">
+                <a:solidFill>
+                  <a:srgbClr val="6E6A86"/>
+                </a:solidFill>
+                <a:latin typeface="Calibri" pitchFamily="34" charset="0"/>
+                <a:ea typeface="Calibri" pitchFamily="34" charset="-122"/>
+                <a:cs typeface="Calibri" pitchFamily="34" charset="-120"/>
+              </a:rPr>
+              <a:t>The opening screen is a chat. The agents do every step through to payment and the ticket.</a:t>
+            </a:r>
+            <a:endParaRPr lang="en-US" sz="1500" dirty="0"/>
+          </a:p>
+        </p:txBody>
+      </p:sp>
+      <p:sp>
+        <p:nvSpPr>
+          <p:cNvPr id="4" name="Shape 2"/>
+          <p:cNvSpPr/>
+          <p:nvPr/>
+        </p:nvSpPr>
+        <p:spPr>
+          <a:xfrm>
+            <a:off x="1645920" y="1691640"/>
+            <a:ext cx="5852160" cy="512064"/>
+          </a:xfrm>
+          <a:prstGeom prst="roundRect">
+            <a:avLst>
+              <a:gd name="adj" fmla="val 21429"/>
+            </a:avLst>
+          </a:prstGeom>
+          <a:solidFill>
+            <a:srgbClr val="4B3FD1"/>
+          </a:solidFill>
+          <a:ln w="9525">
+            <a:solidFill>
+              <a:srgbClr val="4B3FD1"/>
+            </a:solidFill>
+            <a:prstDash val="solid"/>
+          </a:ln>
+        </p:spPr>
+      </p:sp>
+      <p:sp>
+        <p:nvSpPr>
+          <p:cNvPr id="5" name="Text 3"/>
+          <p:cNvSpPr txBox="1"/>
+          <p:nvPr/>
+        </p:nvSpPr>
+        <p:spPr>
+          <a:xfrm>
+            <a:off x="1828800" y="1691640"/>
+            <a:ext cx="5486400" cy="512064"/>
+          </a:xfrm>
+          <a:prstGeom prst="rect">
+            <a:avLst/>
+          </a:prstGeom>
+          <a:noFill/>
+          <a:ln/>
+        </p:spPr>
+        <p:txBody>
+          <a:bodyPr wrap="square" lIns="0" tIns="0" rIns="0" bIns="0" rtlCol="0" anchor="ctr"/>
+          <a:lstStyle/>
+          <a:p>
+            <a:pPr indent="0" marL="0">
+              <a:buNone/>
+            </a:pPr>
+            <a:r>
+              <a:rPr lang="en-US" sz="1250" dirty="0">
+                <a:solidFill>
+                  <a:srgbClr val="FFFFFF"/>
+                </a:solidFill>
+                <a:latin typeface="Calibri" pitchFamily="34" charset="0"/>
+                <a:ea typeface="Calibri" pitchFamily="34" charset="-122"/>
+                <a:cs typeface="Calibri" pitchFamily="34" charset="-120"/>
+              </a:rPr>
+              <a:t>“I’m planning to go for a movie today, can you check the theatres?”</a:t>
+            </a:r>
+            <a:endParaRPr lang="en-US" sz="1250" dirty="0"/>
+          </a:p>
+        </p:txBody>
+      </p:sp>
+      <p:sp>
+        <p:nvSpPr>
+          <p:cNvPr id="6" name="Shape 4"/>
+          <p:cNvSpPr/>
+          <p:nvPr/>
+        </p:nvSpPr>
+        <p:spPr>
+          <a:xfrm>
+            <a:off x="548640" y="2313432"/>
+            <a:ext cx="5852160" cy="512064"/>
+          </a:xfrm>
+          <a:prstGeom prst="roundRect">
+            <a:avLst>
+              <a:gd name="adj" fmla="val 21429"/>
+            </a:avLst>
+          </a:prstGeom>
+          <a:solidFill>
+            <a:srgbClr val="FFFFFF"/>
+          </a:solidFill>
+          <a:ln w="9525">
+            <a:solidFill>
+              <a:srgbClr val="E0DDEE"/>
+            </a:solidFill>
+            <a:prstDash val="solid"/>
+          </a:ln>
+        </p:spPr>
+      </p:sp>
+      <p:sp>
+        <p:nvSpPr>
+          <p:cNvPr id="7" name="Text 5"/>
+          <p:cNvSpPr txBox="1"/>
+          <p:nvPr/>
+        </p:nvSpPr>
+        <p:spPr>
+          <a:xfrm>
+            <a:off x="731520" y="2313432"/>
+            <a:ext cx="5486400" cy="512064"/>
+          </a:xfrm>
+          <a:prstGeom prst="rect">
+            <a:avLst/>
+          </a:prstGeom>
+          <a:noFill/>
+          <a:ln/>
+        </p:spPr>
+        <p:txBody>
+          <a:bodyPr wrap="square" lIns="0" tIns="0" rIns="0" bIns="0" rtlCol="0" anchor="ctr"/>
+          <a:lstStyle/>
+          <a:p>
+            <a:pPr indent="0" marL="0">
+              <a:buNone/>
+            </a:pPr>
+            <a:r>
+              <a:rPr lang="en-US" sz="1250" dirty="0">
+                <a:solidFill>
+                  <a:srgbClr val="1B1938"/>
+                </a:solidFill>
+                <a:latin typeface="Calibri" pitchFamily="34" charset="0"/>
+                <a:ea typeface="Calibri" pitchFamily="34" charset="-122"/>
+                <a:cs typeface="Calibri" pitchFamily="34" charset="-120"/>
+              </a:rPr>
+              <a:t>Lists theatres near you (real cinemas from OpenStreetMap) with shows left today</a:t>
+            </a:r>
+            <a:endParaRPr lang="en-US" sz="1250" dirty="0"/>
+          </a:p>
+        </p:txBody>
+      </p:sp>
+      <p:sp>
+        <p:nvSpPr>
+          <p:cNvPr id="8" name="Shape 6"/>
+          <p:cNvSpPr/>
+          <p:nvPr/>
+        </p:nvSpPr>
+        <p:spPr>
+          <a:xfrm>
+            <a:off x="1645920" y="2935224"/>
+            <a:ext cx="5852160" cy="512064"/>
+          </a:xfrm>
+          <a:prstGeom prst="roundRect">
+            <a:avLst>
+              <a:gd name="adj" fmla="val 21429"/>
+            </a:avLst>
+          </a:prstGeom>
+          <a:solidFill>
+            <a:srgbClr val="4B3FD1"/>
+          </a:solidFill>
+          <a:ln w="9525">
+            <a:solidFill>
+              <a:srgbClr val="4B3FD1"/>
+            </a:solidFill>
+            <a:prstDash val="solid"/>
+          </a:ln>
+        </p:spPr>
+      </p:sp>
+      <p:sp>
+        <p:nvSpPr>
+          <p:cNvPr id="9" name="Text 7"/>
+          <p:cNvSpPr txBox="1"/>
+          <p:nvPr/>
+        </p:nvSpPr>
+        <p:spPr>
+          <a:xfrm>
+            <a:off x="1828800" y="2935224"/>
+            <a:ext cx="5486400" cy="512064"/>
+          </a:xfrm>
+          <a:prstGeom prst="rect">
+            <a:avLst/>
+          </a:prstGeom>
+          <a:noFill/>
+          <a:ln/>
+        </p:spPr>
+        <p:txBody>
+          <a:bodyPr wrap="square" lIns="0" tIns="0" rIns="0" bIns="0" rtlCol="0" anchor="ctr"/>
+          <a:lstStyle/>
+          <a:p>
+            <a:pPr indent="0" marL="0">
+              <a:buNone/>
+            </a:pPr>
+            <a:r>
+              <a:rPr lang="en-US" sz="1250" dirty="0">
+                <a:solidFill>
+                  <a:srgbClr val="FFFFFF"/>
+                </a:solidFill>
+                <a:latin typeface="Calibri" pitchFamily="34" charset="0"/>
+                <a:ea typeface="Calibri" pitchFamily="34" charset="-122"/>
+                <a:cs typeface="Calibri" pitchFamily="34" charset="-120"/>
+              </a:rPr>
+              <a:t>Taps a theatre</a:t>
+            </a:r>
+            <a:endParaRPr lang="en-US" sz="1250" dirty="0"/>
+          </a:p>
+        </p:txBody>
+      </p:sp>
+      <p:sp>
+        <p:nvSpPr>
+          <p:cNvPr id="10" name="Shape 8"/>
+          <p:cNvSpPr/>
+          <p:nvPr/>
+        </p:nvSpPr>
+        <p:spPr>
+          <a:xfrm>
+            <a:off x="548640" y="3557016"/>
+            <a:ext cx="5852160" cy="512064"/>
+          </a:xfrm>
+          <a:prstGeom prst="roundRect">
+            <a:avLst>
+              <a:gd name="adj" fmla="val 21429"/>
+            </a:avLst>
+          </a:prstGeom>
+          <a:solidFill>
+            <a:srgbClr val="FFFFFF"/>
+          </a:solidFill>
+          <a:ln w="9525">
+            <a:solidFill>
+              <a:srgbClr val="E0DDEE"/>
+            </a:solidFill>
+            <a:prstDash val="solid"/>
+          </a:ln>
+        </p:spPr>
+      </p:sp>
+      <p:sp>
+        <p:nvSpPr>
+          <p:cNvPr id="11" name="Text 9"/>
+          <p:cNvSpPr txBox="1"/>
+          <p:nvPr/>
+        </p:nvSpPr>
+        <p:spPr>
+          <a:xfrm>
+            <a:off x="731520" y="3557016"/>
+            <a:ext cx="5486400" cy="512064"/>
+          </a:xfrm>
+          <a:prstGeom prst="rect">
+            <a:avLst/>
+          </a:prstGeom>
+          <a:noFill/>
+          <a:ln/>
+        </p:spPr>
+        <p:txBody>
+          <a:bodyPr wrap="square" lIns="0" tIns="0" rIns="0" bIns="0" rtlCol="0" anchor="ctr"/>
+          <a:lstStyle/>
+          <a:p>
+            <a:pPr indent="0" marL="0">
+              <a:buNone/>
+            </a:pPr>
+            <a:r>
+              <a:rPr lang="en-US" sz="1250" dirty="0">
+                <a:solidFill>
+                  <a:srgbClr val="1B1938"/>
+                </a:solidFill>
+                <a:latin typeface="Calibri" pitchFamily="34" charset="0"/>
+                <a:ea typeface="Calibri" pitchFamily="34" charset="-122"/>
+                <a:cs typeface="Calibri" pitchFamily="34" charset="-120"/>
+              </a:rPr>
+              <a:t>Shows each film and its showtimes; matches your time are highlighted</a:t>
+            </a:r>
+            <a:endParaRPr lang="en-US" sz="1250" dirty="0"/>
+          </a:p>
+        </p:txBody>
+      </p:sp>
+      <p:sp>
+        <p:nvSpPr>
+          <p:cNvPr id="12" name="Shape 10"/>
+          <p:cNvSpPr/>
+          <p:nvPr/>
+        </p:nvSpPr>
+        <p:spPr>
+          <a:xfrm>
+            <a:off x="1645920" y="4178808"/>
+            <a:ext cx="5852160" cy="512064"/>
+          </a:xfrm>
+          <a:prstGeom prst="roundRect">
+            <a:avLst>
+              <a:gd name="adj" fmla="val 21429"/>
+            </a:avLst>
+          </a:prstGeom>
+          <a:solidFill>
+            <a:srgbClr val="4B3FD1"/>
+          </a:solidFill>
+          <a:ln w="9525">
+            <a:solidFill>
+              <a:srgbClr val="4B3FD1"/>
+            </a:solidFill>
+            <a:prstDash val="solid"/>
+          </a:ln>
+        </p:spPr>
+      </p:sp>
+      <p:sp>
+        <p:nvSpPr>
+          <p:cNvPr id="13" name="Text 11"/>
+          <p:cNvSpPr txBox="1"/>
+          <p:nvPr/>
+        </p:nvSpPr>
+        <p:spPr>
+          <a:xfrm>
+            <a:off x="1828800" y="4178808"/>
+            <a:ext cx="5486400" cy="512064"/>
+          </a:xfrm>
+          <a:prstGeom prst="rect">
+            <a:avLst/>
+          </a:prstGeom>
+          <a:noFill/>
+          <a:ln/>
+        </p:spPr>
+        <p:txBody>
+          <a:bodyPr wrap="square" lIns="0" tIns="0" rIns="0" bIns="0" rtlCol="0" anchor="ctr"/>
+          <a:lstStyle/>
+          <a:p>
+            <a:pPr indent="0" marL="0">
+              <a:buNone/>
+            </a:pPr>
+            <a:r>
+              <a:rPr lang="en-US" sz="1250" dirty="0">
+                <a:solidFill>
+                  <a:srgbClr val="FFFFFF"/>
+                </a:solidFill>
+                <a:latin typeface="Calibri" pitchFamily="34" charset="0"/>
+                <a:ea typeface="Calibri" pitchFamily="34" charset="-122"/>
+                <a:cs typeface="Calibri" pitchFamily="34" charset="-120"/>
+              </a:rPr>
+              <a:t>“2 tickets” → confirms the seats the agent preselected</a:t>
+            </a:r>
+            <a:endParaRPr lang="en-US" sz="1250" dirty="0"/>
+          </a:p>
+        </p:txBody>
+      </p:sp>
+      <p:sp>
+        <p:nvSpPr>
+          <p:cNvPr id="14" name="Shape 12"/>
+          <p:cNvSpPr/>
+          <p:nvPr/>
+        </p:nvSpPr>
+        <p:spPr>
+          <a:xfrm>
+            <a:off x="548640" y="4800600"/>
+            <a:ext cx="5852160" cy="512064"/>
+          </a:xfrm>
+          <a:prstGeom prst="roundRect">
+            <a:avLst>
+              <a:gd name="adj" fmla="val 21429"/>
+            </a:avLst>
+          </a:prstGeom>
+          <a:solidFill>
+            <a:srgbClr val="FFFFFF"/>
+          </a:solidFill>
+          <a:ln w="9525">
+            <a:solidFill>
+              <a:srgbClr val="E0DDEE"/>
+            </a:solidFill>
+            <a:prstDash val="solid"/>
+          </a:ln>
+        </p:spPr>
+      </p:sp>
+      <p:sp>
+        <p:nvSpPr>
+          <p:cNvPr id="15" name="Text 13"/>
+          <p:cNvSpPr txBox="1"/>
+          <p:nvPr/>
+        </p:nvSpPr>
+        <p:spPr>
+          <a:xfrm>
+            <a:off x="731520" y="4800600"/>
+            <a:ext cx="5486400" cy="512064"/>
+          </a:xfrm>
+          <a:prstGeom prst="rect">
+            <a:avLst/>
+          </a:prstGeom>
+          <a:noFill/>
+          <a:ln/>
+        </p:spPr>
+        <p:txBody>
+          <a:bodyPr wrap="square" lIns="0" tIns="0" rIns="0" bIns="0" rtlCol="0" anchor="ctr"/>
+          <a:lstStyle/>
+          <a:p>
+            <a:pPr indent="0" marL="0">
+              <a:buNone/>
+            </a:pPr>
+            <a:r>
+              <a:rPr lang="en-US" sz="1250" dirty="0">
+                <a:solidFill>
+                  <a:srgbClr val="1B1938"/>
+                </a:solidFill>
+                <a:latin typeface="Calibri" pitchFamily="34" charset="0"/>
+                <a:ea typeface="Calibri" pitchFamily="34" charset="-122"/>
+                <a:cs typeface="Calibri" pitchFamily="34" charset="-120"/>
+              </a:rPr>
+              <a:t>Budget + Policy checks, then who pays → payment page (UPI / card / netbanking)</a:t>
+            </a:r>
+            <a:endParaRPr lang="en-US" sz="1250" dirty="0"/>
+          </a:p>
+        </p:txBody>
+      </p:sp>
+      <p:sp>
+        <p:nvSpPr>
+          <p:cNvPr id="16" name="Shape 14"/>
+          <p:cNvSpPr/>
+          <p:nvPr/>
+        </p:nvSpPr>
+        <p:spPr>
+          <a:xfrm>
+            <a:off x="548640" y="5422392"/>
+            <a:ext cx="5852160" cy="512064"/>
+          </a:xfrm>
+          <a:prstGeom prst="roundRect">
+            <a:avLst>
+              <a:gd name="adj" fmla="val 21429"/>
+            </a:avLst>
+          </a:prstGeom>
+          <a:solidFill>
+            <a:srgbClr val="FFFFFF"/>
+          </a:solidFill>
+          <a:ln w="9525">
+            <a:solidFill>
+              <a:srgbClr val="E0DDEE"/>
+            </a:solidFill>
+            <a:prstDash val="solid"/>
+          </a:ln>
+        </p:spPr>
+      </p:sp>
+      <p:sp>
+        <p:nvSpPr>
+          <p:cNvPr id="17" name="Text 15"/>
+          <p:cNvSpPr txBox="1"/>
+          <p:nvPr/>
+        </p:nvSpPr>
+        <p:spPr>
+          <a:xfrm>
+            <a:off x="731520" y="5422392"/>
+            <a:ext cx="5486400" cy="512064"/>
+          </a:xfrm>
+          <a:prstGeom prst="rect">
+            <a:avLst/>
+          </a:prstGeom>
+          <a:noFill/>
+          <a:ln/>
+        </p:spPr>
+        <p:txBody>
+          <a:bodyPr wrap="square" lIns="0" tIns="0" rIns="0" bIns="0" rtlCol="0" anchor="ctr"/>
+          <a:lstStyle/>
+          <a:p>
+            <a:pPr indent="0" marL="0">
+              <a:buNone/>
+            </a:pPr>
+            <a:r>
+              <a:rPr lang="en-US" sz="1250" dirty="0">
+                <a:solidFill>
+                  <a:srgbClr val="1B1938"/>
+                </a:solidFill>
+                <a:latin typeface="Calibri" pitchFamily="34" charset="0"/>
+                <a:ea typeface="Calibri" pitchFamily="34" charset="-122"/>
+                <a:cs typeface="Calibri" pitchFamily="34" charset="-120"/>
+              </a:rPr>
+              <a:t>Books, sends the ticket, splits with the group, offers to file the expense</a:t>
+            </a:r>
+            <a:endParaRPr lang="en-US" sz="1250" dirty="0"/>
+          </a:p>
+        </p:txBody>
+      </p:sp>
+      <p:sp>
+        <p:nvSpPr>
+          <p:cNvPr id="18" name="Shape 16"/>
+          <p:cNvSpPr/>
+          <p:nvPr/>
+        </p:nvSpPr>
+        <p:spPr>
+          <a:xfrm>
+            <a:off x="7863840" y="1691640"/>
+            <a:ext cx="3779215" cy="4297680"/>
+          </a:xfrm>
+          <a:prstGeom prst="roundRect">
+            <a:avLst>
+              <a:gd name="adj" fmla="val 3629"/>
+            </a:avLst>
+          </a:prstGeom>
+          <a:solidFill>
+            <a:srgbClr val="F7F6FB"/>
+          </a:solidFill>
+          <a:ln w="9525">
+            <a:solidFill>
+              <a:srgbClr val="E0DDEE"/>
+            </a:solidFill>
+            <a:prstDash val="solid"/>
+          </a:ln>
+        </p:spPr>
+      </p:sp>
+      <p:sp>
+        <p:nvSpPr>
+          <p:cNvPr id="19" name="Text 17"/>
+          <p:cNvSpPr txBox="1"/>
+          <p:nvPr/>
+        </p:nvSpPr>
+        <p:spPr>
+          <a:xfrm>
+            <a:off x="8138160" y="1828800"/>
+            <a:ext cx="3230575" cy="411480"/>
+          </a:xfrm>
+          <a:prstGeom prst="rect">
+            <a:avLst/>
+          </a:prstGeom>
+          <a:noFill/>
+          <a:ln/>
+        </p:spPr>
+        <p:txBody>
+          <a:bodyPr wrap="square" lIns="0" tIns="0" rIns="0" bIns="0" rtlCol="0" anchor="ctr"/>
+          <a:lstStyle/>
+          <a:p>
+            <a:pPr indent="0" marL="0">
+              <a:buNone/>
+            </a:pPr>
+            <a:r>
+              <a:rPr lang="en-US" sz="1700" b="1" dirty="0">
+                <a:solidFill>
+                  <a:srgbClr val="1B1938"/>
+                </a:solidFill>
+                <a:latin typeface="Cambria" pitchFamily="34" charset="0"/>
+                <a:ea typeface="Cambria" pitchFamily="34" charset="-122"/>
+                <a:cs typeface="Cambria" pitchFamily="34" charset="-120"/>
+              </a:rPr>
+              <a:t>Live data, free APIs</a:t>
+            </a:r>
+            <a:endParaRPr lang="en-US" sz="1700" dirty="0"/>
+          </a:p>
+        </p:txBody>
+      </p:sp>
+      <p:sp>
+        <p:nvSpPr>
+          <p:cNvPr id="20" name="Text 18"/>
+          <p:cNvSpPr txBox="1"/>
+          <p:nvPr/>
+        </p:nvSpPr>
+        <p:spPr>
+          <a:xfrm>
+            <a:off x="8138160" y="2331720"/>
+            <a:ext cx="3230575" cy="2743200"/>
+          </a:xfrm>
+          <a:prstGeom prst="rect">
+            <a:avLst/>
+          </a:prstGeom>
+          <a:noFill/>
+          <a:ln/>
+        </p:spPr>
+        <p:txBody>
+          <a:bodyPr wrap="square" lIns="0" tIns="0" rIns="0" bIns="0" rtlCol="0" anchor="t"/>
+          <a:lstStyle/>
+          <a:p>
+            <a:pPr marL="342900" indent="-342900">
+              <a:spcAft>
+                <a:spcPts val="600"/>
+              </a:spcAft>
+              <a:buSzPct val="100000"/>
+              <a:buChar char="•"/>
+            </a:pPr>
+            <a:r>
+              <a:rPr lang="en-US" sz="1300" dirty="0">
+                <a:solidFill>
+                  <a:srgbClr val="1B1938"/>
+                </a:solidFill>
+                <a:latin typeface="Calibri" pitchFamily="34" charset="0"/>
+                <a:ea typeface="Calibri" pitchFamily="34" charset="-122"/>
+                <a:cs typeface="Calibri" pitchFamily="34" charset="-120"/>
+              </a:rPr>
+              <a:t>OpenStreetMap: real cinemas, restaurants, venues</a:t>
+            </a:r>
+            <a:endParaRPr lang="en-US" sz="1300" dirty="0"/>
+          </a:p>
+          <a:p>
+            <a:pPr marL="342900" indent="-342900">
+              <a:spcAft>
+                <a:spcPts val="600"/>
+              </a:spcAft>
+              <a:buSzPct val="100000"/>
+              <a:buChar char="•"/>
+            </a:pPr>
+            <a:r>
+              <a:rPr lang="en-US" sz="1300" dirty="0">
+                <a:solidFill>
+                  <a:srgbClr val="1B1938"/>
+                </a:solidFill>
+                <a:latin typeface="Calibri" pitchFamily="34" charset="0"/>
+                <a:ea typeface="Calibri" pitchFamily="34" charset="-122"/>
+                <a:cs typeface="Calibri" pitchFamily="34" charset="-120"/>
+              </a:rPr>
+              <a:t>iTunes chart / TMDB: films and posters</a:t>
+            </a:r>
+            <a:endParaRPr lang="en-US" sz="1300" dirty="0"/>
+          </a:p>
+          <a:p>
+            <a:pPr marL="342900" indent="-342900">
+              <a:spcAft>
+                <a:spcPts val="600"/>
+              </a:spcAft>
+              <a:buSzPct val="100000"/>
+              <a:buChar char="•"/>
+            </a:pPr>
+            <a:r>
+              <a:rPr lang="en-US" sz="1300" dirty="0">
+                <a:solidFill>
+                  <a:srgbClr val="1B1938"/>
+                </a:solidFill>
+                <a:latin typeface="Calibri" pitchFamily="34" charset="0"/>
+                <a:ea typeface="Calibri" pitchFamily="34" charset="-122"/>
+                <a:cs typeface="Calibri" pitchFamily="34" charset="-120"/>
+              </a:rPr>
+              <a:t>TheSportsDB: IPL, ISL, NHL, NBA, MLS, CFL fixtures</a:t>
+            </a:r>
+            <a:endParaRPr lang="en-US" sz="1300" dirty="0"/>
+          </a:p>
+          <a:p>
+            <a:pPr marL="342900" indent="-342900">
+              <a:spcAft>
+                <a:spcPts val="600"/>
+              </a:spcAft>
+              <a:buSzPct val="100000"/>
+              <a:buChar char="•"/>
+            </a:pPr>
+            <a:r>
+              <a:rPr lang="en-US" sz="1300" dirty="0">
+                <a:solidFill>
+                  <a:srgbClr val="1B1938"/>
+                </a:solidFill>
+                <a:latin typeface="Calibri" pitchFamily="34" charset="0"/>
+                <a:ea typeface="Calibri" pitchFamily="34" charset="-122"/>
+                <a:cs typeface="Calibri" pitchFamily="34" charset="-120"/>
+              </a:rPr>
+              <a:t>Open-Meteo: weather</a:t>
+            </a:r>
+            <a:endParaRPr lang="en-US" sz="1300" dirty="0"/>
+          </a:p>
+          <a:p>
+            <a:pPr marL="342900" indent="-342900">
+              <a:spcAft>
+                <a:spcPts val="600"/>
+              </a:spcAft>
+              <a:buSzPct val="100000"/>
+              <a:buChar char="•"/>
+            </a:pPr>
+            <a:r>
+              <a:rPr lang="en-US" sz="1300" dirty="0">
+                <a:solidFill>
+                  <a:srgbClr val="1B1938"/>
+                </a:solidFill>
+                <a:latin typeface="Calibri" pitchFamily="34" charset="0"/>
+                <a:ea typeface="Calibri" pitchFamily="34" charset="-122"/>
+                <a:cs typeface="Calibri" pitchFamily="34" charset="-120"/>
+              </a:rPr>
+              <a:t>Frankfurter: ₹ ↔ C$ rates</a:t>
+            </a:r>
+            <a:endParaRPr lang="en-US" sz="1300" dirty="0"/>
+          </a:p>
+          <a:p>
+            <a:pPr marL="342900" indent="-342900">
+              <a:spcAft>
+                <a:spcPts val="600"/>
+              </a:spcAft>
+              <a:buSzPct val="100000"/>
+              <a:buChar char="•"/>
+            </a:pPr>
+            <a:r>
+              <a:rPr lang="en-US" sz="1300" dirty="0">
+                <a:solidFill>
+                  <a:srgbClr val="1B1938"/>
+                </a:solidFill>
+                <a:latin typeface="Calibri" pitchFamily="34" charset="0"/>
+                <a:ea typeface="Calibri" pitchFamily="34" charset="-122"/>
+                <a:cs typeface="Calibri" pitchFamily="34" charset="-120"/>
+              </a:rPr>
+              <a:t>Nager.Date: public holidays</a:t>
+            </a:r>
+            <a:endParaRPr lang="en-US" sz="1300" dirty="0"/>
+          </a:p>
+        </p:txBody>
+      </p:sp>
+      <p:sp>
+        <p:nvSpPr>
+          <p:cNvPr id="21" name="Text 19"/>
+          <p:cNvSpPr txBox="1"/>
+          <p:nvPr/>
+        </p:nvSpPr>
+        <p:spPr>
+          <a:xfrm>
+            <a:off x="8138160" y="5166360"/>
+            <a:ext cx="3230575" cy="640080"/>
+          </a:xfrm>
+          <a:prstGeom prst="rect">
+            <a:avLst/>
+          </a:prstGeom>
+          <a:noFill/>
+          <a:ln/>
+        </p:spPr>
+        <p:txBody>
+          <a:bodyPr wrap="square" lIns="0" tIns="0" rIns="0" bIns="0" rtlCol="0" anchor="ctr"/>
+          <a:lstStyle/>
+          <a:p>
+            <a:pPr indent="0" marL="0">
+              <a:buNone/>
+            </a:pPr>
+            <a:r>
+              <a:rPr lang="en-US" sz="1150" i="1" dirty="0">
+                <a:solidFill>
+                  <a:srgbClr val="6E6A86"/>
+                </a:solidFill>
+                <a:latin typeface="Calibri" pitchFamily="34" charset="0"/>
+                <a:ea typeface="Calibri" pitchFamily="34" charset="-122"/>
+                <a:cs typeface="Calibri" pitchFamily="34" charset="-120"/>
+              </a:rPr>
+              <a:t>Falls back to labelled sample data offline. Payments are a demo gateway.</a:t>
+            </a:r>
+            <a:endParaRPr lang="en-US" sz="1150" dirty="0"/>
+          </a:p>
+        </p:txBody>
+      </p:sp>
+    </p:spTree>
+  </p:cSld>
+  <p:clrMapOvr>
+    <a:masterClrMapping/>
+  </p:clrMapOvr>
+</p:sld>
+</file>
+
+<file path=ppt/slides/slide6.xml><?xml version="1.0" encoding="utf-8"?>
+<p:sld xmlns:a="http://schemas.openxmlformats.org/drawingml/2006/main" xmlns:r="http://schemas.openxmlformats.org/officeDocument/2006/relationships" xmlns:p="http://schemas.openxmlformats.org/presentationml/2006/main">
+  <p:cSld name="Slide 6">
+    <p:spTree>
+      <p:nvGrpSpPr>
+        <p:cNvPr id="1" name=""/>
+        <p:cNvGrpSpPr/>
+        <p:nvPr/>
+      </p:nvGrpSpPr>
+      <p:grpSpPr>
+        <a:xfrm>
+          <a:off x="0" y="0"/>
+          <a:ext cx="0" cy="0"/>
+          <a:chOff x="0" y="0"/>
+          <a:chExt cx="0" cy="0"/>
+        </a:xfrm>
+      </p:grpSpPr>
+      <p:sp>
+        <p:nvSpPr>
+          <p:cNvPr id="2" name="Text 0"/>
+          <p:cNvSpPr txBox="1"/>
+          <p:nvPr/>
+        </p:nvSpPr>
+        <p:spPr>
+          <a:xfrm>
+            <a:off x="548640" y="365760"/>
+            <a:ext cx="11094415" cy="731520"/>
+          </a:xfrm>
+          <a:prstGeom prst="rect">
+            <a:avLst/>
+          </a:prstGeom>
+          <a:noFill/>
+          <a:ln/>
+        </p:spPr>
+        <p:txBody>
+          <a:bodyPr wrap="square" lIns="0" tIns="0" rIns="0" bIns="0" rtlCol="0" anchor="ctr"/>
+          <a:lstStyle/>
+          <a:p>
+            <a:pPr indent="0" marL="0">
+              <a:buNone/>
+            </a:pPr>
+            <a:r>
+              <a:rPr lang="en-US" sz="3400" b="1" dirty="0">
+                <a:solidFill>
+                  <a:srgbClr val="1B1938"/>
+                </a:solidFill>
+                <a:latin typeface="Cambria" pitchFamily="34" charset="0"/>
+                <a:ea typeface="Cambria" pitchFamily="34" charset="-122"/>
+                <a:cs typeface="Cambria" pitchFamily="34" charset="-120"/>
+              </a:rPr>
               <a:t>Every booking answers four questions</a:t>
             </a:r>
             <a:endParaRPr lang="en-US" sz="3400" dirty="0"/>
@@ -8973,9 +10795,9 @@
 </p:sld>
 </file>
 
-<file path=ppt/slides/slide6.xml><?xml version="1.0" encoding="utf-8"?>
+<file path=ppt/slides/slide7.xml><?xml version="1.0" encoding="utf-8"?>
 <p:sld xmlns:a="http://schemas.openxmlformats.org/drawingml/2006/main" xmlns:r="http://schemas.openxmlformats.org/officeDocument/2006/relationships" xmlns:p="http://schemas.openxmlformats.org/presentationml/2006/main">
-  <p:cSld name="Slide 6">
+  <p:cSld name="Slide 7">
     <p:bg>
       <p:bgPr>
         <a:solidFill>
@@ -10429,9 +12251,9 @@
 </p:sld>
 </file>
 
-<file path=ppt/slides/slide7.xml><?xml version="1.0" encoding="utf-8"?>
+<file path=ppt/slides/slide8.xml><?xml version="1.0" encoding="utf-8"?>
 <p:sld xmlns:a="http://schemas.openxmlformats.org/drawingml/2006/main" xmlns:r="http://schemas.openxmlformats.org/officeDocument/2006/relationships" xmlns:p="http://schemas.openxmlformats.org/presentationml/2006/main">
-  <p:cSld name="Slide 7">
+  <p:cSld name="Slide 8">
     <p:spTree>
       <p:nvGrpSpPr>
         <p:cNvPr id="1" name=""/>
@@ -11732,9 +13554,9 @@
 </p:sld>
 </file>
 
-<file path=ppt/slides/slide8.xml><?xml version="1.0" encoding="utf-8"?>
+<file path=ppt/slides/slide9.xml><?xml version="1.0" encoding="utf-8"?>
 <p:sld xmlns:a="http://schemas.openxmlformats.org/drawingml/2006/main" xmlns:r="http://schemas.openxmlformats.org/officeDocument/2006/relationships" xmlns:p="http://schemas.openxmlformats.org/presentationml/2006/main">
-  <p:cSld name="Slide 8">
+  <p:cSld name="Slide 9">
     <p:bg>
       <p:bgPr>
         <a:solidFill>
@@ -12545,900 +14367,6 @@
                 <a:cs typeface="Calibri" pitchFamily="34" charset="-120"/>
               </a:rPr>
               <a:t>A rejection ends the chain and releases held seats</a:t>
-            </a:r>
-            <a:endParaRPr lang="en-US" sz="1300" dirty="0"/>
-          </a:p>
-        </p:txBody>
-      </p:sp>
-    </p:spTree>
-  </p:cSld>
-  <p:clrMapOvr>
-    <a:masterClrMapping/>
-  </p:clrMapOvr>
-</p:sld>
-</file>
-
-<file path=ppt/slides/slide9.xml><?xml version="1.0" encoding="utf-8"?>
-<p:sld xmlns:a="http://schemas.openxmlformats.org/drawingml/2006/main" xmlns:r="http://schemas.openxmlformats.org/officeDocument/2006/relationships" xmlns:p="http://schemas.openxmlformats.org/presentationml/2006/main">
-  <p:cSld name="Slide 9">
-    <p:spTree>
-      <p:nvGrpSpPr>
-        <p:cNvPr id="1" name=""/>
-        <p:cNvGrpSpPr/>
-        <p:nvPr/>
-      </p:nvGrpSpPr>
-      <p:grpSpPr>
-        <a:xfrm>
-          <a:off x="0" y="0"/>
-          <a:ext cx="0" cy="0"/>
-          <a:chOff x="0" y="0"/>
-          <a:chExt cx="0" cy="0"/>
-        </a:xfrm>
-      </p:grpSpPr>
-      <p:sp>
-        <p:nvSpPr>
-          <p:cNvPr id="2" name="Text 0"/>
-          <p:cNvSpPr txBox="1"/>
-          <p:nvPr/>
-        </p:nvSpPr>
-        <p:spPr>
-          <a:xfrm>
-            <a:off x="548640" y="365760"/>
-            <a:ext cx="11094415" cy="731520"/>
-          </a:xfrm>
-          <a:prstGeom prst="rect">
-            <a:avLst/>
-          </a:prstGeom>
-          <a:noFill/>
-          <a:ln/>
-        </p:spPr>
-        <p:txBody>
-          <a:bodyPr wrap="square" lIns="0" tIns="0" rIns="0" bIns="0" rtlCol="0" anchor="ctr"/>
-          <a:lstStyle/>
-          <a:p>
-            <a:pPr indent="0" marL="0">
-              <a:buNone/>
-            </a:pPr>
-            <a:r>
-              <a:rPr lang="en-US" sz="3400" b="1" dirty="0">
-                <a:solidFill>
-                  <a:srgbClr val="1B1938"/>
-                </a:solidFill>
-                <a:latin typeface="Cambria" pitchFamily="34" charset="0"/>
-                <a:ea typeface="Cambria" pitchFamily="34" charset="-122"/>
-                <a:cs typeface="Cambria" pitchFamily="34" charset="-120"/>
-              </a:rPr>
-              <a:t>Spent your own money? Expense reports</a:t>
-            </a:r>
-            <a:endParaRPr lang="en-US" sz="3400" dirty="0"/>
-          </a:p>
-        </p:txBody>
-      </p:sp>
-      <p:sp>
-        <p:nvSpPr>
-          <p:cNvPr id="3" name="Text 1"/>
-          <p:cNvSpPr txBox="1"/>
-          <p:nvPr/>
-        </p:nvSpPr>
-        <p:spPr>
-          <a:xfrm>
-            <a:off x="548640" y="1051560"/>
-            <a:ext cx="11094415" cy="411480"/>
-          </a:xfrm>
-          <a:prstGeom prst="rect">
-            <a:avLst/>
-          </a:prstGeom>
-          <a:noFill/>
-          <a:ln/>
-        </p:spPr>
-        <p:txBody>
-          <a:bodyPr wrap="square" lIns="0" tIns="0" rIns="0" bIns="0" rtlCol="0" anchor="ctr"/>
-          <a:lstStyle/>
-          <a:p>
-            <a:pPr indent="0" marL="0">
-              <a:buNone/>
-            </a:pPr>
-            <a:r>
-              <a:rPr lang="en-US" sz="1500" dirty="0">
-                <a:solidFill>
-                  <a:srgbClr val="6E6A86"/>
-                </a:solidFill>
-                <a:latin typeface="Calibri" pitchFamily="34" charset="0"/>
-                <a:ea typeface="Calibri" pitchFamily="34" charset="-122"/>
-                <a:cs typeface="Calibri" pitchFamily="34" charset="-120"/>
-              </a:rPr>
-              <a:t>The Expense agent drafts the report with receipts and routes it to the right team.</a:t>
-            </a:r>
-            <a:endParaRPr lang="en-US" sz="1500" dirty="0"/>
-          </a:p>
-        </p:txBody>
-      </p:sp>
-      <p:sp>
-        <p:nvSpPr>
-          <p:cNvPr id="4" name="Shape 2"/>
-          <p:cNvSpPr/>
-          <p:nvPr/>
-        </p:nvSpPr>
-        <p:spPr>
-          <a:xfrm>
-            <a:off x="548640" y="1783080"/>
-            <a:ext cx="2264603" cy="868680"/>
-          </a:xfrm>
-          <a:prstGeom prst="chevron">
-            <a:avLst/>
-          </a:prstGeom>
-          <a:solidFill>
-            <a:srgbClr val="ECEBFF"/>
-          </a:solidFill>
-          <a:ln w="12700">
-            <a:solidFill>
-              <a:srgbClr val="FFFFFF"/>
-            </a:solidFill>
-            <a:prstDash val="solid"/>
-          </a:ln>
-        </p:spPr>
-      </p:sp>
-      <p:sp>
-        <p:nvSpPr>
-          <p:cNvPr id="5" name="Text 3"/>
-          <p:cNvSpPr txBox="1"/>
-          <p:nvPr/>
-        </p:nvSpPr>
-        <p:spPr>
-          <a:xfrm>
-            <a:off x="896112" y="1783080"/>
-            <a:ext cx="1670243" cy="868680"/>
-          </a:xfrm>
-          <a:prstGeom prst="rect">
-            <a:avLst/>
-          </a:prstGeom>
-          <a:noFill/>
-          <a:ln/>
-        </p:spPr>
-        <p:txBody>
-          <a:bodyPr wrap="square" lIns="0" tIns="0" rIns="0" bIns="0" rtlCol="0" anchor="ctr"/>
-          <a:lstStyle/>
-          <a:p>
-            <a:pPr algn="ctr" indent="0" marL="0">
-              <a:buNone/>
-            </a:pPr>
-            <a:r>
-              <a:rPr lang="en-US" sz="1200" b="1" dirty="0">
-                <a:solidFill>
-                  <a:srgbClr val="4B3FD1"/>
-                </a:solidFill>
-                <a:latin typeface="Calibri" pitchFamily="34" charset="0"/>
-                <a:ea typeface="Calibri" pitchFamily="34" charset="-122"/>
-                <a:cs typeface="Calibri" pitchFamily="34" charset="-120"/>
-              </a:rPr>
-              <a:t>Book as "paid personally"</a:t>
-            </a:r>
-            <a:endParaRPr lang="en-US" sz="1200" dirty="0"/>
-          </a:p>
-        </p:txBody>
-      </p:sp>
-      <p:sp>
-        <p:nvSpPr>
-          <p:cNvPr id="6" name="Shape 4"/>
-          <p:cNvSpPr/>
-          <p:nvPr/>
-        </p:nvSpPr>
-        <p:spPr>
-          <a:xfrm>
-            <a:off x="2767523" y="1783080"/>
-            <a:ext cx="2264603" cy="868680"/>
-          </a:xfrm>
-          <a:prstGeom prst="chevron">
-            <a:avLst/>
-          </a:prstGeom>
-          <a:solidFill>
-            <a:srgbClr val="ECEBFF"/>
-          </a:solidFill>
-          <a:ln w="12700">
-            <a:solidFill>
-              <a:srgbClr val="FFFFFF"/>
-            </a:solidFill>
-            <a:prstDash val="solid"/>
-          </a:ln>
-        </p:spPr>
-      </p:sp>
-      <p:sp>
-        <p:nvSpPr>
-          <p:cNvPr id="7" name="Text 5"/>
-          <p:cNvSpPr txBox="1"/>
-          <p:nvPr/>
-        </p:nvSpPr>
-        <p:spPr>
-          <a:xfrm>
-            <a:off x="3114995" y="1783080"/>
-            <a:ext cx="1670243" cy="868680"/>
-          </a:xfrm>
-          <a:prstGeom prst="rect">
-            <a:avLst/>
-          </a:prstGeom>
-          <a:noFill/>
-          <a:ln/>
-        </p:spPr>
-        <p:txBody>
-          <a:bodyPr wrap="square" lIns="0" tIns="0" rIns="0" bIns="0" rtlCol="0" anchor="ctr"/>
-          <a:lstStyle/>
-          <a:p>
-            <a:pPr algn="ctr" indent="0" marL="0">
-              <a:buNone/>
-            </a:pPr>
-            <a:r>
-              <a:rPr lang="en-US" sz="1200" b="1" dirty="0">
-                <a:solidFill>
-                  <a:srgbClr val="4B3FD1"/>
-                </a:solidFill>
-                <a:latin typeface="Calibri" pitchFamily="34" charset="0"/>
-                <a:ea typeface="Calibri" pitchFamily="34" charset="-122"/>
-                <a:cs typeface="Calibri" pitchFamily="34" charset="-120"/>
-              </a:rPr>
-              <a:t>Confirmed, receipt captured</a:t>
-            </a:r>
-            <a:endParaRPr lang="en-US" sz="1200" dirty="0"/>
-          </a:p>
-        </p:txBody>
-      </p:sp>
-      <p:sp>
-        <p:nvSpPr>
-          <p:cNvPr id="8" name="Shape 6"/>
-          <p:cNvSpPr/>
-          <p:nvPr/>
-        </p:nvSpPr>
-        <p:spPr>
-          <a:xfrm>
-            <a:off x="4986406" y="1783080"/>
-            <a:ext cx="2264603" cy="868680"/>
-          </a:xfrm>
-          <a:prstGeom prst="chevron">
-            <a:avLst/>
-          </a:prstGeom>
-          <a:solidFill>
-            <a:srgbClr val="ECEBFF"/>
-          </a:solidFill>
-          <a:ln w="12700">
-            <a:solidFill>
-              <a:srgbClr val="FFFFFF"/>
-            </a:solidFill>
-            <a:prstDash val="solid"/>
-          </a:ln>
-        </p:spPr>
-      </p:sp>
-      <p:sp>
-        <p:nvSpPr>
-          <p:cNvPr id="9" name="Text 7"/>
-          <p:cNvSpPr txBox="1"/>
-          <p:nvPr/>
-        </p:nvSpPr>
-        <p:spPr>
-          <a:xfrm>
-            <a:off x="5333878" y="1783080"/>
-            <a:ext cx="1670243" cy="868680"/>
-          </a:xfrm>
-          <a:prstGeom prst="rect">
-            <a:avLst/>
-          </a:prstGeom>
-          <a:noFill/>
-          <a:ln/>
-        </p:spPr>
-        <p:txBody>
-          <a:bodyPr wrap="square" lIns="0" tIns="0" rIns="0" bIns="0" rtlCol="0" anchor="ctr"/>
-          <a:lstStyle/>
-          <a:p>
-            <a:pPr algn="ctr" indent="0" marL="0">
-              <a:buNone/>
-            </a:pPr>
-            <a:r>
-              <a:rPr lang="en-US" sz="1200" b="1" dirty="0">
-                <a:solidFill>
-                  <a:srgbClr val="4B3FD1"/>
-                </a:solidFill>
-                <a:latin typeface="Calibri" pitchFamily="34" charset="0"/>
-                <a:ea typeface="Calibri" pitchFamily="34" charset="-122"/>
-                <a:cs typeface="Calibri" pitchFamily="34" charset="-120"/>
-              </a:rPr>
-              <a:t>Select bookings → submit</a:t>
-            </a:r>
-            <a:endParaRPr lang="en-US" sz="1200" dirty="0"/>
-          </a:p>
-        </p:txBody>
-      </p:sp>
-      <p:sp>
-        <p:nvSpPr>
-          <p:cNvPr id="10" name="Shape 8"/>
-          <p:cNvSpPr/>
-          <p:nvPr/>
-        </p:nvSpPr>
-        <p:spPr>
-          <a:xfrm>
-            <a:off x="7205289" y="1783080"/>
-            <a:ext cx="2264603" cy="868680"/>
-          </a:xfrm>
-          <a:prstGeom prst="chevron">
-            <a:avLst/>
-          </a:prstGeom>
-          <a:solidFill>
-            <a:srgbClr val="ECEBFF"/>
-          </a:solidFill>
-          <a:ln w="12700">
-            <a:solidFill>
-              <a:srgbClr val="FFFFFF"/>
-            </a:solidFill>
-            <a:prstDash val="solid"/>
-          </a:ln>
-        </p:spPr>
-      </p:sp>
-      <p:sp>
-        <p:nvSpPr>
-          <p:cNvPr id="11" name="Text 9"/>
-          <p:cNvSpPr txBox="1"/>
-          <p:nvPr/>
-        </p:nvSpPr>
-        <p:spPr>
-          <a:xfrm>
-            <a:off x="7552761" y="1783080"/>
-            <a:ext cx="1670243" cy="868680"/>
-          </a:xfrm>
-          <a:prstGeom prst="rect">
-            <a:avLst/>
-          </a:prstGeom>
-          <a:noFill/>
-          <a:ln/>
-        </p:spPr>
-        <p:txBody>
-          <a:bodyPr wrap="square" lIns="0" tIns="0" rIns="0" bIns="0" rtlCol="0" anchor="ctr"/>
-          <a:lstStyle/>
-          <a:p>
-            <a:pPr algn="ctr" indent="0" marL="0">
-              <a:buNone/>
-            </a:pPr>
-            <a:r>
-              <a:rPr lang="en-US" sz="1200" b="1" dirty="0">
-                <a:solidFill>
-                  <a:srgbClr val="4B3FD1"/>
-                </a:solidFill>
-                <a:latin typeface="Calibri" pitchFamily="34" charset="0"/>
-                <a:ea typeface="Calibri" pitchFamily="34" charset="-122"/>
-                <a:cs typeface="Calibri" pitchFamily="34" charset="-120"/>
-              </a:rPr>
-              <a:t>Routed by report type</a:t>
-            </a:r>
-            <a:endParaRPr lang="en-US" sz="1200" dirty="0"/>
-          </a:p>
-        </p:txBody>
-      </p:sp>
-      <p:sp>
-        <p:nvSpPr>
-          <p:cNvPr id="12" name="Shape 10"/>
-          <p:cNvSpPr/>
-          <p:nvPr/>
-        </p:nvSpPr>
-        <p:spPr>
-          <a:xfrm>
-            <a:off x="9424172" y="1783080"/>
-            <a:ext cx="2264603" cy="868680"/>
-          </a:xfrm>
-          <a:prstGeom prst="chevron">
-            <a:avLst/>
-          </a:prstGeom>
-          <a:solidFill>
-            <a:srgbClr val="1D8A5A"/>
-          </a:solidFill>
-          <a:ln w="12700">
-            <a:solidFill>
-              <a:srgbClr val="FFFFFF"/>
-            </a:solidFill>
-            <a:prstDash val="solid"/>
-          </a:ln>
-        </p:spPr>
-      </p:sp>
-      <p:sp>
-        <p:nvSpPr>
-          <p:cNvPr id="13" name="Text 11"/>
-          <p:cNvSpPr txBox="1"/>
-          <p:nvPr/>
-        </p:nvSpPr>
-        <p:spPr>
-          <a:xfrm>
-            <a:off x="9771644" y="1783080"/>
-            <a:ext cx="1670243" cy="868680"/>
-          </a:xfrm>
-          <a:prstGeom prst="rect">
-            <a:avLst/>
-          </a:prstGeom>
-          <a:noFill/>
-          <a:ln/>
-        </p:spPr>
-        <p:txBody>
-          <a:bodyPr wrap="square" lIns="0" tIns="0" rIns="0" bIns="0" rtlCol="0" anchor="ctr"/>
-          <a:lstStyle/>
-          <a:p>
-            <a:pPr algn="ctr" indent="0" marL="0">
-              <a:buNone/>
-            </a:pPr>
-            <a:r>
-              <a:rPr lang="en-US" sz="1200" b="1" dirty="0">
-                <a:solidFill>
-                  <a:srgbClr val="FFFFFF"/>
-                </a:solidFill>
-                <a:latin typeface="Calibri" pitchFamily="34" charset="0"/>
-                <a:ea typeface="Calibri" pitchFamily="34" charset="-122"/>
-                <a:cs typeface="Calibri" pitchFamily="34" charset="-120"/>
-              </a:rPr>
-              <a:t>Approved → reimbursed with payroll</a:t>
-            </a:r>
-            <a:endParaRPr lang="en-US" sz="1200" dirty="0"/>
-          </a:p>
-        </p:txBody>
-      </p:sp>
-      <p:sp>
-        <p:nvSpPr>
-          <p:cNvPr id="14" name="Shape 12"/>
-          <p:cNvSpPr/>
-          <p:nvPr/>
-        </p:nvSpPr>
-        <p:spPr>
-          <a:xfrm>
-            <a:off x="548640" y="3063240"/>
-            <a:ext cx="3520440" cy="2011680"/>
-          </a:xfrm>
-          <a:prstGeom prst="roundRect">
-            <a:avLst>
-              <a:gd name="adj" fmla="val 6818"/>
-            </a:avLst>
-          </a:prstGeom>
-          <a:solidFill>
-            <a:srgbClr val="ECEBFF"/>
-          </a:solidFill>
-          <a:ln w="12700">
-            <a:solidFill>
-              <a:srgbClr val="ECEBFF"/>
-            </a:solidFill>
-            <a:prstDash val="solid"/>
-          </a:ln>
-        </p:spPr>
-      </p:sp>
-      <p:sp>
-        <p:nvSpPr>
-          <p:cNvPr id="15" name="Text 13"/>
-          <p:cNvSpPr txBox="1"/>
-          <p:nvPr/>
-        </p:nvSpPr>
-        <p:spPr>
-          <a:xfrm>
-            <a:off x="822960" y="3246120"/>
-            <a:ext cx="3017520" cy="411480"/>
-          </a:xfrm>
-          <a:prstGeom prst="rect">
-            <a:avLst/>
-          </a:prstGeom>
-          <a:noFill/>
-          <a:ln/>
-        </p:spPr>
-        <p:txBody>
-          <a:bodyPr wrap="square" lIns="0" tIns="0" rIns="0" bIns="0" rtlCol="0" anchor="ctr"/>
-          <a:lstStyle/>
-          <a:p>
-            <a:pPr indent="0" marL="0">
-              <a:buNone/>
-            </a:pPr>
-            <a:r>
-              <a:rPr lang="en-US" sz="1900" b="1" dirty="0">
-                <a:solidFill>
-                  <a:srgbClr val="4B3FD1"/>
-                </a:solidFill>
-                <a:latin typeface="Cambria" pitchFamily="34" charset="0"/>
-                <a:ea typeface="Cambria" pitchFamily="34" charset="-122"/>
-                <a:cs typeface="Cambria" pitchFamily="34" charset="-120"/>
-              </a:rPr>
-              <a:t>Client / business</a:t>
-            </a:r>
-            <a:endParaRPr lang="en-US" sz="1900" dirty="0"/>
-          </a:p>
-        </p:txBody>
-      </p:sp>
-      <p:sp>
-        <p:nvSpPr>
-          <p:cNvPr id="16" name="Text 14"/>
-          <p:cNvSpPr txBox="1"/>
-          <p:nvPr/>
-        </p:nvSpPr>
-        <p:spPr>
-          <a:xfrm>
-            <a:off x="822960" y="3703320"/>
-            <a:ext cx="3017520" cy="457200"/>
-          </a:xfrm>
-          <a:prstGeom prst="rect">
-            <a:avLst/>
-          </a:prstGeom>
-          <a:noFill/>
-          <a:ln/>
-        </p:spPr>
-        <p:txBody>
-          <a:bodyPr wrap="square" lIns="0" tIns="0" rIns="0" bIns="0" rtlCol="0" anchor="ctr"/>
-          <a:lstStyle/>
-          <a:p>
-            <a:pPr indent="0" marL="0">
-              <a:buNone/>
-            </a:pPr>
-            <a:r>
-              <a:rPr lang="en-US" sz="1300" dirty="0">
-                <a:solidFill>
-                  <a:srgbClr val="6E6A86"/>
-                </a:solidFill>
-                <a:latin typeface="Calibri" pitchFamily="34" charset="0"/>
-                <a:ea typeface="Calibri" pitchFamily="34" charset="-122"/>
-                <a:cs typeface="Calibri" pitchFamily="34" charset="-120"/>
-              </a:rPr>
-              <a:t>Client lunch, prospect drinks</a:t>
-            </a:r>
-            <a:endParaRPr lang="en-US" sz="1300" dirty="0"/>
-          </a:p>
-        </p:txBody>
-      </p:sp>
-      <p:sp>
-        <p:nvSpPr>
-          <p:cNvPr id="17" name="Text 15"/>
-          <p:cNvSpPr txBox="1"/>
-          <p:nvPr/>
-        </p:nvSpPr>
-        <p:spPr>
-          <a:xfrm>
-            <a:off x="822960" y="4251960"/>
-            <a:ext cx="3017520" cy="640080"/>
-          </a:xfrm>
-          <a:prstGeom prst="rect">
-            <a:avLst/>
-          </a:prstGeom>
-          <a:noFill/>
-          <a:ln/>
-        </p:spPr>
-        <p:txBody>
-          <a:bodyPr wrap="square" lIns="0" tIns="0" rIns="0" bIns="0" rtlCol="0" anchor="t"/>
-          <a:lstStyle/>
-          <a:p>
-            <a:pPr indent="0" marL="0">
-              <a:buNone/>
-            </a:pPr>
-            <a:r>
-              <a:rPr lang="en-US" sz="1500" b="1" dirty="0">
-                <a:solidFill>
-                  <a:srgbClr val="1B1938"/>
-                </a:solidFill>
-                <a:latin typeface="Calibri" pitchFamily="34" charset="0"/>
-                <a:ea typeface="Calibri" pitchFamily="34" charset="-122"/>
-                <a:cs typeface="Calibri" pitchFamily="34" charset="-120"/>
-              </a:rPr>
-              <a:t>Manager → Finance</a:t>
-            </a:r>
-            <a:endParaRPr lang="en-US" sz="1500" dirty="0"/>
-          </a:p>
-        </p:txBody>
-      </p:sp>
-      <p:sp>
-        <p:nvSpPr>
-          <p:cNvPr id="18" name="Shape 16"/>
-          <p:cNvSpPr/>
-          <p:nvPr/>
-        </p:nvSpPr>
-        <p:spPr>
-          <a:xfrm>
-            <a:off x="4297680" y="3063240"/>
-            <a:ext cx="3520440" cy="2011680"/>
-          </a:xfrm>
-          <a:prstGeom prst="roundRect">
-            <a:avLst>
-              <a:gd name="adj" fmla="val 6818"/>
-            </a:avLst>
-          </a:prstGeom>
-          <a:solidFill>
-            <a:srgbClr val="E3F5EC"/>
-          </a:solidFill>
-          <a:ln w="12700">
-            <a:solidFill>
-              <a:srgbClr val="E3F5EC"/>
-            </a:solidFill>
-            <a:prstDash val="solid"/>
-          </a:ln>
-        </p:spPr>
-      </p:sp>
-      <p:sp>
-        <p:nvSpPr>
-          <p:cNvPr id="19" name="Text 17"/>
-          <p:cNvSpPr txBox="1"/>
-          <p:nvPr/>
-        </p:nvSpPr>
-        <p:spPr>
-          <a:xfrm>
-            <a:off x="4572000" y="3246120"/>
-            <a:ext cx="3017520" cy="411480"/>
-          </a:xfrm>
-          <a:prstGeom prst="rect">
-            <a:avLst/>
-          </a:prstGeom>
-          <a:noFill/>
-          <a:ln/>
-        </p:spPr>
-        <p:txBody>
-          <a:bodyPr wrap="square" lIns="0" tIns="0" rIns="0" bIns="0" rtlCol="0" anchor="ctr"/>
-          <a:lstStyle/>
-          <a:p>
-            <a:pPr indent="0" marL="0">
-              <a:buNone/>
-            </a:pPr>
-            <a:r>
-              <a:rPr lang="en-US" sz="1900" b="1" dirty="0">
-                <a:solidFill>
-                  <a:srgbClr val="1D8A5A"/>
-                </a:solidFill>
-                <a:latin typeface="Cambria" pitchFamily="34" charset="0"/>
-                <a:ea typeface="Cambria" pitchFamily="34" charset="-122"/>
-                <a:cs typeface="Cambria" pitchFamily="34" charset="-120"/>
-              </a:rPr>
-              <a:t>Team morale</a:t>
-            </a:r>
-            <a:endParaRPr lang="en-US" sz="1900" dirty="0"/>
-          </a:p>
-        </p:txBody>
-      </p:sp>
-      <p:sp>
-        <p:nvSpPr>
-          <p:cNvPr id="20" name="Text 18"/>
-          <p:cNvSpPr txBox="1"/>
-          <p:nvPr/>
-        </p:nvSpPr>
-        <p:spPr>
-          <a:xfrm>
-            <a:off x="4572000" y="3703320"/>
-            <a:ext cx="3017520" cy="457200"/>
-          </a:xfrm>
-          <a:prstGeom prst="rect">
-            <a:avLst/>
-          </a:prstGeom>
-          <a:noFill/>
-          <a:ln/>
-        </p:spPr>
-        <p:txBody>
-          <a:bodyPr wrap="square" lIns="0" tIns="0" rIns="0" bIns="0" rtlCol="0" anchor="ctr"/>
-          <a:lstStyle/>
-          <a:p>
-            <a:pPr indent="0" marL="0">
-              <a:buNone/>
-            </a:pPr>
-            <a:r>
-              <a:rPr lang="en-US" sz="1300" dirty="0">
-                <a:solidFill>
-                  <a:srgbClr val="6E6A86"/>
-                </a:solidFill>
-                <a:latin typeface="Calibri" pitchFamily="34" charset="0"/>
-                <a:ea typeface="Calibri" pitchFamily="34" charset="-122"/>
-                <a:cs typeface="Calibri" pitchFamily="34" charset="-120"/>
-              </a:rPr>
-              <a:t>Team drinks, celebrations, offsites</a:t>
-            </a:r>
-            <a:endParaRPr lang="en-US" sz="1300" dirty="0"/>
-          </a:p>
-        </p:txBody>
-      </p:sp>
-      <p:sp>
-        <p:nvSpPr>
-          <p:cNvPr id="21" name="Text 19"/>
-          <p:cNvSpPr txBox="1"/>
-          <p:nvPr/>
-        </p:nvSpPr>
-        <p:spPr>
-          <a:xfrm>
-            <a:off x="4572000" y="4251960"/>
-            <a:ext cx="3017520" cy="640080"/>
-          </a:xfrm>
-          <a:prstGeom prst="rect">
-            <a:avLst/>
-          </a:prstGeom>
-          <a:noFill/>
-          <a:ln/>
-        </p:spPr>
-        <p:txBody>
-          <a:bodyPr wrap="square" lIns="0" tIns="0" rIns="0" bIns="0" rtlCol="0" anchor="t"/>
-          <a:lstStyle/>
-          <a:p>
-            <a:pPr indent="0" marL="0">
-              <a:buNone/>
-            </a:pPr>
-            <a:r>
-              <a:rPr lang="en-US" sz="1500" b="1" dirty="0">
-                <a:solidFill>
-                  <a:srgbClr val="1B1938"/>
-                </a:solidFill>
-                <a:latin typeface="Calibri" pitchFamily="34" charset="0"/>
-                <a:ea typeface="Calibri" pitchFamily="34" charset="-122"/>
-                <a:cs typeface="Calibri" pitchFamily="34" charset="-120"/>
-              </a:rPr>
-              <a:t>Manager → HR</a:t>
-            </a:r>
-            <a:endParaRPr lang="en-US" sz="1500" dirty="0"/>
-          </a:p>
-        </p:txBody>
-      </p:sp>
-      <p:sp>
-        <p:nvSpPr>
-          <p:cNvPr id="22" name="Shape 20"/>
-          <p:cNvSpPr/>
-          <p:nvPr/>
-        </p:nvSpPr>
-        <p:spPr>
-          <a:xfrm>
-            <a:off x="8046720" y="3063240"/>
-            <a:ext cx="3520440" cy="2011680"/>
-          </a:xfrm>
-          <a:prstGeom prst="roundRect">
-            <a:avLst>
-              <a:gd name="adj" fmla="val 6818"/>
-            </a:avLst>
-          </a:prstGeom>
-          <a:solidFill>
-            <a:srgbClr val="FDF1DC"/>
-          </a:solidFill>
-          <a:ln w="12700">
-            <a:solidFill>
-              <a:srgbClr val="FDF1DC"/>
-            </a:solidFill>
-            <a:prstDash val="solid"/>
-          </a:ln>
-        </p:spPr>
-      </p:sp>
-      <p:sp>
-        <p:nvSpPr>
-          <p:cNvPr id="23" name="Text 21"/>
-          <p:cNvSpPr txBox="1"/>
-          <p:nvPr/>
-        </p:nvSpPr>
-        <p:spPr>
-          <a:xfrm>
-            <a:off x="8321040" y="3246120"/>
-            <a:ext cx="3017520" cy="411480"/>
-          </a:xfrm>
-          <a:prstGeom prst="rect">
-            <a:avLst/>
-          </a:prstGeom>
-          <a:noFill/>
-          <a:ln/>
-        </p:spPr>
-        <p:txBody>
-          <a:bodyPr wrap="square" lIns="0" tIns="0" rIns="0" bIns="0" rtlCol="0" anchor="ctr"/>
-          <a:lstStyle/>
-          <a:p>
-            <a:pPr indent="0" marL="0">
-              <a:buNone/>
-            </a:pPr>
-            <a:r>
-              <a:rPr lang="en-US" sz="1900" b="1" dirty="0">
-                <a:solidFill>
-                  <a:srgbClr val="A8660B"/>
-                </a:solidFill>
-                <a:latin typeface="Cambria" pitchFamily="34" charset="0"/>
-                <a:ea typeface="Cambria" pitchFamily="34" charset="-122"/>
-                <a:cs typeface="Cambria" pitchFamily="34" charset="-120"/>
-              </a:rPr>
-              <a:t>Wellbeing allowance</a:t>
-            </a:r>
-            <a:endParaRPr lang="en-US" sz="1900" dirty="0"/>
-          </a:p>
-        </p:txBody>
-      </p:sp>
-      <p:sp>
-        <p:nvSpPr>
-          <p:cNvPr id="24" name="Text 22"/>
-          <p:cNvSpPr txBox="1"/>
-          <p:nvPr/>
-        </p:nvSpPr>
-        <p:spPr>
-          <a:xfrm>
-            <a:off x="8321040" y="3703320"/>
-            <a:ext cx="3017520" cy="457200"/>
-          </a:xfrm>
-          <a:prstGeom prst="rect">
-            <a:avLst/>
-          </a:prstGeom>
-          <a:noFill/>
-          <a:ln/>
-        </p:spPr>
-        <p:txBody>
-          <a:bodyPr wrap="square" lIns="0" tIns="0" rIns="0" bIns="0" rtlCol="0" anchor="ctr"/>
-          <a:lstStyle/>
-          <a:p>
-            <a:pPr indent="0" marL="0">
-              <a:buNone/>
-            </a:pPr>
-            <a:r>
-              <a:rPr lang="en-US" sz="1300" dirty="0">
-                <a:solidFill>
-                  <a:srgbClr val="6E6A86"/>
-                </a:solidFill>
-                <a:latin typeface="Calibri" pitchFamily="34" charset="0"/>
-                <a:ea typeface="Calibri" pitchFamily="34" charset="-122"/>
-                <a:cs typeface="Calibri" pitchFamily="34" charset="-120"/>
-              </a:rPr>
-              <a:t>Cooking class, fitness, a concert for you</a:t>
-            </a:r>
-            <a:endParaRPr lang="en-US" sz="1300" dirty="0"/>
-          </a:p>
-        </p:txBody>
-      </p:sp>
-      <p:sp>
-        <p:nvSpPr>
-          <p:cNvPr id="25" name="Text 23"/>
-          <p:cNvSpPr txBox="1"/>
-          <p:nvPr/>
-        </p:nvSpPr>
-        <p:spPr>
-          <a:xfrm>
-            <a:off x="8321040" y="4251960"/>
-            <a:ext cx="3017520" cy="640080"/>
-          </a:xfrm>
-          <a:prstGeom prst="rect">
-            <a:avLst/>
-          </a:prstGeom>
-          <a:noFill/>
-          <a:ln/>
-        </p:spPr>
-        <p:txBody>
-          <a:bodyPr wrap="square" lIns="0" tIns="0" rIns="0" bIns="0" rtlCol="0" anchor="t"/>
-          <a:lstStyle/>
-          <a:p>
-            <a:pPr indent="0" marL="0">
-              <a:buNone/>
-            </a:pPr>
-            <a:r>
-              <a:rPr lang="en-US" sz="1500" b="1" dirty="0">
-                <a:solidFill>
-                  <a:srgbClr val="1B1938"/>
-                </a:solidFill>
-                <a:latin typeface="Calibri" pitchFamily="34" charset="0"/>
-                <a:ea typeface="Calibri" pitchFamily="34" charset="-122"/>
-                <a:cs typeface="Calibri" pitchFamily="34" charset="-120"/>
-              </a:rPr>
-              <a:t>Benefits only · capped at your balance</a:t>
-            </a:r>
-            <a:endParaRPr lang="en-US" sz="1500" dirty="0"/>
-          </a:p>
-        </p:txBody>
-      </p:sp>
-      <p:sp>
-        <p:nvSpPr>
-          <p:cNvPr id="26" name="Text 24"/>
-          <p:cNvSpPr txBox="1"/>
-          <p:nvPr/>
-        </p:nvSpPr>
-        <p:spPr>
-          <a:xfrm>
-            <a:off x="548640" y="5440680"/>
-            <a:ext cx="11094415" cy="640080"/>
-          </a:xfrm>
-          <a:prstGeom prst="rect">
-            <a:avLst/>
-          </a:prstGeom>
-          <a:noFill/>
-          <a:ln/>
-        </p:spPr>
-        <p:txBody>
-          <a:bodyPr wrap="square" lIns="0" tIns="0" rIns="0" bIns="0" rtlCol="0" anchor="ctr"/>
-          <a:lstStyle/>
-          <a:p>
-            <a:pPr indent="0" marL="0">
-              <a:buNone/>
-            </a:pPr>
-            <a:r>
-              <a:rPr lang="en-US" sz="1300" dirty="0">
-                <a:solidFill>
-                  <a:srgbClr val="6E6A86"/>
-                </a:solidFill>
-                <a:latin typeface="Calibri" pitchFamily="34" charset="0"/>
-                <a:ea typeface="Calibri" pitchFamily="34" charset="-122"/>
-                <a:cs typeface="Calibri" pitchFamily="34" charset="-120"/>
-              </a:rPr>
-              <a:t>Guardrails: a booking can be claimed only once · only the owner submits · submit within 5 business days · a claimed booking can’t be cancelled until its report is withdrawn.</a:t>
             </a:r>
             <a:endParaRPr lang="en-US" sz="1300" dirty="0"/>
           </a:p>
